--- a/Stochastic_Option_Pricing_Presentation_v2.pptx
+++ b/Stochastic_Option_Pricing_Presentation_v2.pptx
@@ -5,37 +5,37 @@
     <p:sldMasterId id="2147483648" r:id="rId1"/>
   </p:sldMasterIdLst>
   <p:sldIdLst>
-    <p:sldId id="256" r:id="rId7"/>
-    <p:sldId id="257" r:id="rId8"/>
-    <p:sldId id="258" r:id="rId9"/>
-    <p:sldId id="259" r:id="rId10"/>
-    <p:sldId id="260" r:id="rId11"/>
-    <p:sldId id="261" r:id="rId12"/>
-    <p:sldId id="262" r:id="rId13"/>
-    <p:sldId id="263" r:id="rId14"/>
-    <p:sldId id="264" r:id="rId15"/>
-    <p:sldId id="265" r:id="rId16"/>
-    <p:sldId id="266" r:id="rId17"/>
-    <p:sldId id="267" r:id="rId18"/>
-    <p:sldId id="268" r:id="rId19"/>
-    <p:sldId id="269" r:id="rId20"/>
-    <p:sldId id="270" r:id="rId21"/>
-    <p:sldId id="271" r:id="rId22"/>
-    <p:sldId id="272" r:id="rId23"/>
-    <p:sldId id="273" r:id="rId24"/>
-    <p:sldId id="274" r:id="rId25"/>
-    <p:sldId id="275" r:id="rId26"/>
-    <p:sldId id="276" r:id="rId27"/>
-    <p:sldId id="277" r:id="rId28"/>
-    <p:sldId id="278" r:id="rId29"/>
-    <p:sldId id="279" r:id="rId30"/>
-    <p:sldId id="280" r:id="rId31"/>
-    <p:sldId id="281" r:id="rId32"/>
-    <p:sldId id="282" r:id="rId33"/>
-    <p:sldId id="283" r:id="rId34"/>
-    <p:sldId id="284" r:id="rId35"/>
+    <p:sldId id="256" r:id="rId2"/>
+    <p:sldId id="257" r:id="rId3"/>
+    <p:sldId id="258" r:id="rId4"/>
+    <p:sldId id="259" r:id="rId5"/>
+    <p:sldId id="260" r:id="rId6"/>
+    <p:sldId id="261" r:id="rId7"/>
+    <p:sldId id="262" r:id="rId8"/>
+    <p:sldId id="263" r:id="rId9"/>
+    <p:sldId id="264" r:id="rId10"/>
+    <p:sldId id="265" r:id="rId11"/>
+    <p:sldId id="266" r:id="rId12"/>
+    <p:sldId id="267" r:id="rId13"/>
+    <p:sldId id="268" r:id="rId14"/>
+    <p:sldId id="269" r:id="rId15"/>
+    <p:sldId id="270" r:id="rId16"/>
+    <p:sldId id="271" r:id="rId17"/>
+    <p:sldId id="272" r:id="rId18"/>
+    <p:sldId id="273" r:id="rId19"/>
+    <p:sldId id="274" r:id="rId20"/>
+    <p:sldId id="275" r:id="rId21"/>
+    <p:sldId id="276" r:id="rId22"/>
+    <p:sldId id="277" r:id="rId23"/>
+    <p:sldId id="278" r:id="rId24"/>
+    <p:sldId id="279" r:id="rId25"/>
+    <p:sldId id="280" r:id="rId26"/>
+    <p:sldId id="281" r:id="rId27"/>
+    <p:sldId id="282" r:id="rId28"/>
+    <p:sldId id="283" r:id="rId29"/>
+    <p:sldId id="284" r:id="rId30"/>
   </p:sldIdLst>
-  <p:sldSz cx="12191695" cy="6858000" type="screen4x3"/>
+  <p:sldSz cx="12192000" cy="6858000"/>
   <p:notesSz cx="6858000" cy="9144000"/>
   <p:defaultTextStyle>
     <a:defPPr>
@@ -132,6 +132,22 @@
       </a:defRPr>
     </a:lvl9pPr>
   </p:defaultTextStyle>
+  <p:extLst>
+    <p:ext uri="{EFAFB233-063F-42B5-8137-9DF3F51BA10A}">
+      <p15:sldGuideLst xmlns:p15="http://schemas.microsoft.com/office/powerpoint/2012/main">
+        <p15:guide id="1" orient="horz" pos="2160">
+          <p15:clr>
+            <a:srgbClr val="A4A3A4"/>
+          </p15:clr>
+        </p15:guide>
+        <p15:guide id="2" pos="2880">
+          <p15:clr>
+            <a:srgbClr val="A4A3A4"/>
+          </p15:clr>
+        </p15:guide>
+      </p15:sldGuideLst>
+    </p:ext>
+  </p:extLst>
 </p:presentation>
 </file>
 
@@ -173,10 +189,9 @@
           <a:lstStyle/>
           <a:p>
             <a:r>
-              <a:rPr lang="en-US" smtClean="0"/>
+              <a:rPr lang="en-US"/>
               <a:t>Click to edit Master title style</a:t>
             </a:r>
-            <a:endParaRPr lang="en-US"/>
           </a:p>
         </p:txBody>
       </p:sp>
@@ -292,10 +307,9 @@
           </a:lstStyle>
           <a:p>
             <a:r>
-              <a:rPr lang="en-US" smtClean="0"/>
+              <a:rPr lang="en-US"/>
               <a:t>Click to edit Master subtitle style</a:t>
             </a:r>
-            <a:endParaRPr lang="en-US"/>
           </a:p>
         </p:txBody>
       </p:sp>
@@ -316,7 +330,7 @@
           <a:p>
             <a:fld id="{5BCAD085-E8A6-8845-BD4E-CB4CCA059FC4}" type="datetimeFigureOut">
               <a:rPr lang="en-US" smtClean="0"/>
-              <a:t>1/27/13</a:t>
+              <a:t>3/18/2026</a:t>
             </a:fld>
             <a:endParaRPr lang="en-US"/>
           </a:p>
@@ -410,10 +424,9 @@
           <a:lstStyle/>
           <a:p>
             <a:r>
-              <a:rPr lang="en-US" smtClean="0"/>
+              <a:rPr lang="en-US"/>
               <a:t>Click to edit Master title style</a:t>
             </a:r>
-            <a:endParaRPr lang="en-US"/>
           </a:p>
         </p:txBody>
       </p:sp>
@@ -434,38 +447,37 @@
           <a:p>
             <a:pPr lvl="0"/>
             <a:r>
-              <a:rPr lang="en-US" smtClean="0"/>
+              <a:rPr lang="en-US"/>
               <a:t>Click to edit Master text styles</a:t>
             </a:r>
           </a:p>
           <a:p>
             <a:pPr lvl="1"/>
             <a:r>
-              <a:rPr lang="en-US" smtClean="0"/>
+              <a:rPr lang="en-US"/>
               <a:t>Second level</a:t>
             </a:r>
           </a:p>
           <a:p>
             <a:pPr lvl="2"/>
             <a:r>
-              <a:rPr lang="en-US" smtClean="0"/>
+              <a:rPr lang="en-US"/>
               <a:t>Third level</a:t>
             </a:r>
           </a:p>
           <a:p>
             <a:pPr lvl="3"/>
             <a:r>
-              <a:rPr lang="en-US" smtClean="0"/>
+              <a:rPr lang="en-US"/>
               <a:t>Fourth level</a:t>
             </a:r>
           </a:p>
           <a:p>
             <a:pPr lvl="4"/>
             <a:r>
-              <a:rPr lang="en-US" smtClean="0"/>
+              <a:rPr lang="en-US"/>
               <a:t>Fifth level</a:t>
             </a:r>
-            <a:endParaRPr lang="en-US"/>
           </a:p>
         </p:txBody>
       </p:sp>
@@ -486,7 +498,7 @@
           <a:p>
             <a:fld id="{5BCAD085-E8A6-8845-BD4E-CB4CCA059FC4}" type="datetimeFigureOut">
               <a:rPr lang="en-US" smtClean="0"/>
-              <a:t>1/27/13</a:t>
+              <a:t>3/18/2026</a:t>
             </a:fld>
             <a:endParaRPr lang="en-US"/>
           </a:p>
@@ -585,10 +597,9 @@
           <a:lstStyle/>
           <a:p>
             <a:r>
-              <a:rPr lang="en-US" smtClean="0"/>
+              <a:rPr lang="en-US"/>
               <a:t>Click to edit Master title style</a:t>
             </a:r>
-            <a:endParaRPr lang="en-US"/>
           </a:p>
         </p:txBody>
       </p:sp>
@@ -614,38 +625,37 @@
           <a:p>
             <a:pPr lvl="0"/>
             <a:r>
-              <a:rPr lang="en-US" smtClean="0"/>
+              <a:rPr lang="en-US"/>
               <a:t>Click to edit Master text styles</a:t>
             </a:r>
           </a:p>
           <a:p>
             <a:pPr lvl="1"/>
             <a:r>
-              <a:rPr lang="en-US" smtClean="0"/>
+              <a:rPr lang="en-US"/>
               <a:t>Second level</a:t>
             </a:r>
           </a:p>
           <a:p>
             <a:pPr lvl="2"/>
             <a:r>
-              <a:rPr lang="en-US" smtClean="0"/>
+              <a:rPr lang="en-US"/>
               <a:t>Third level</a:t>
             </a:r>
           </a:p>
           <a:p>
             <a:pPr lvl="3"/>
             <a:r>
-              <a:rPr lang="en-US" smtClean="0"/>
+              <a:rPr lang="en-US"/>
               <a:t>Fourth level</a:t>
             </a:r>
           </a:p>
           <a:p>
             <a:pPr lvl="4"/>
             <a:r>
-              <a:rPr lang="en-US" smtClean="0"/>
+              <a:rPr lang="en-US"/>
               <a:t>Fifth level</a:t>
             </a:r>
-            <a:endParaRPr lang="en-US"/>
           </a:p>
         </p:txBody>
       </p:sp>
@@ -666,7 +676,7 @@
           <a:p>
             <a:fld id="{5BCAD085-E8A6-8845-BD4E-CB4CCA059FC4}" type="datetimeFigureOut">
               <a:rPr lang="en-US" smtClean="0"/>
-              <a:t>1/27/13</a:t>
+              <a:t>3/18/2026</a:t>
             </a:fld>
             <a:endParaRPr lang="en-US"/>
           </a:p>
@@ -760,10 +770,9 @@
           <a:lstStyle/>
           <a:p>
             <a:r>
-              <a:rPr lang="en-US" smtClean="0"/>
+              <a:rPr lang="en-US"/>
               <a:t>Click to edit Master title style</a:t>
             </a:r>
-            <a:endParaRPr lang="en-US"/>
           </a:p>
         </p:txBody>
       </p:sp>
@@ -784,38 +793,37 @@
           <a:p>
             <a:pPr lvl="0"/>
             <a:r>
-              <a:rPr lang="en-US" smtClean="0"/>
+              <a:rPr lang="en-US"/>
               <a:t>Click to edit Master text styles</a:t>
             </a:r>
           </a:p>
           <a:p>
             <a:pPr lvl="1"/>
             <a:r>
-              <a:rPr lang="en-US" smtClean="0"/>
+              <a:rPr lang="en-US"/>
               <a:t>Second level</a:t>
             </a:r>
           </a:p>
           <a:p>
             <a:pPr lvl="2"/>
             <a:r>
-              <a:rPr lang="en-US" smtClean="0"/>
+              <a:rPr lang="en-US"/>
               <a:t>Third level</a:t>
             </a:r>
           </a:p>
           <a:p>
             <a:pPr lvl="3"/>
             <a:r>
-              <a:rPr lang="en-US" smtClean="0"/>
+              <a:rPr lang="en-US"/>
               <a:t>Fourth level</a:t>
             </a:r>
           </a:p>
           <a:p>
             <a:pPr lvl="4"/>
             <a:r>
-              <a:rPr lang="en-US" smtClean="0"/>
+              <a:rPr lang="en-US"/>
               <a:t>Fifth level</a:t>
             </a:r>
-            <a:endParaRPr lang="en-US"/>
           </a:p>
         </p:txBody>
       </p:sp>
@@ -836,7 +844,7 @@
           <a:p>
             <a:fld id="{5BCAD085-E8A6-8845-BD4E-CB4CCA059FC4}" type="datetimeFigureOut">
               <a:rPr lang="en-US" smtClean="0"/>
-              <a:t>1/27/13</a:t>
+              <a:t>3/18/2026</a:t>
             </a:fld>
             <a:endParaRPr lang="en-US"/>
           </a:p>
@@ -939,10 +947,9 @@
           </a:lstStyle>
           <a:p>
             <a:r>
-              <a:rPr lang="en-US" smtClean="0"/>
+              <a:rPr lang="en-US"/>
               <a:t>Click to edit Master title style</a:t>
             </a:r>
-            <a:endParaRPr lang="en-US"/>
           </a:p>
         </p:txBody>
       </p:sp>
@@ -1059,7 +1066,7 @@
           <a:p>
             <a:pPr lvl="0"/>
             <a:r>
-              <a:rPr lang="en-US" smtClean="0"/>
+              <a:rPr lang="en-US"/>
               <a:t>Click to edit Master text styles</a:t>
             </a:r>
           </a:p>
@@ -1082,7 +1089,7 @@
           <a:p>
             <a:fld id="{5BCAD085-E8A6-8845-BD4E-CB4CCA059FC4}" type="datetimeFigureOut">
               <a:rPr lang="en-US" smtClean="0"/>
-              <a:t>1/27/13</a:t>
+              <a:t>3/18/2026</a:t>
             </a:fld>
             <a:endParaRPr lang="en-US"/>
           </a:p>
@@ -1176,10 +1183,9 @@
           <a:lstStyle/>
           <a:p>
             <a:r>
-              <a:rPr lang="en-US" smtClean="0"/>
+              <a:rPr lang="en-US"/>
               <a:t>Click to edit Master title style</a:t>
             </a:r>
-            <a:endParaRPr lang="en-US"/>
           </a:p>
         </p:txBody>
       </p:sp>
@@ -1233,38 +1239,37 @@
           <a:p>
             <a:pPr lvl="0"/>
             <a:r>
-              <a:rPr lang="en-US" smtClean="0"/>
+              <a:rPr lang="en-US"/>
               <a:t>Click to edit Master text styles</a:t>
             </a:r>
           </a:p>
           <a:p>
             <a:pPr lvl="1"/>
             <a:r>
-              <a:rPr lang="en-US" smtClean="0"/>
+              <a:rPr lang="en-US"/>
               <a:t>Second level</a:t>
             </a:r>
           </a:p>
           <a:p>
             <a:pPr lvl="2"/>
             <a:r>
-              <a:rPr lang="en-US" smtClean="0"/>
+              <a:rPr lang="en-US"/>
               <a:t>Third level</a:t>
             </a:r>
           </a:p>
           <a:p>
             <a:pPr lvl="3"/>
             <a:r>
-              <a:rPr lang="en-US" smtClean="0"/>
+              <a:rPr lang="en-US"/>
               <a:t>Fourth level</a:t>
             </a:r>
           </a:p>
           <a:p>
             <a:pPr lvl="4"/>
             <a:r>
-              <a:rPr lang="en-US" smtClean="0"/>
+              <a:rPr lang="en-US"/>
               <a:t>Fifth level</a:t>
             </a:r>
-            <a:endParaRPr lang="en-US"/>
           </a:p>
         </p:txBody>
       </p:sp>
@@ -1318,38 +1323,37 @@
           <a:p>
             <a:pPr lvl="0"/>
             <a:r>
-              <a:rPr lang="en-US" smtClean="0"/>
+              <a:rPr lang="en-US"/>
               <a:t>Click to edit Master text styles</a:t>
             </a:r>
           </a:p>
           <a:p>
             <a:pPr lvl="1"/>
             <a:r>
-              <a:rPr lang="en-US" smtClean="0"/>
+              <a:rPr lang="en-US"/>
               <a:t>Second level</a:t>
             </a:r>
           </a:p>
           <a:p>
             <a:pPr lvl="2"/>
             <a:r>
-              <a:rPr lang="en-US" smtClean="0"/>
+              <a:rPr lang="en-US"/>
               <a:t>Third level</a:t>
             </a:r>
           </a:p>
           <a:p>
             <a:pPr lvl="3"/>
             <a:r>
-              <a:rPr lang="en-US" smtClean="0"/>
+              <a:rPr lang="en-US"/>
               <a:t>Fourth level</a:t>
             </a:r>
           </a:p>
           <a:p>
             <a:pPr lvl="4"/>
             <a:r>
-              <a:rPr lang="en-US" smtClean="0"/>
+              <a:rPr lang="en-US"/>
               <a:t>Fifth level</a:t>
             </a:r>
-            <a:endParaRPr lang="en-US"/>
           </a:p>
         </p:txBody>
       </p:sp>
@@ -1370,7 +1374,7 @@
           <a:p>
             <a:fld id="{5BCAD085-E8A6-8845-BD4E-CB4CCA059FC4}" type="datetimeFigureOut">
               <a:rPr lang="en-US" smtClean="0"/>
-              <a:t>1/27/13</a:t>
+              <a:t>3/18/2026</a:t>
             </a:fld>
             <a:endParaRPr lang="en-US"/>
           </a:p>
@@ -1468,10 +1472,9 @@
           </a:lstStyle>
           <a:p>
             <a:r>
-              <a:rPr lang="en-US" smtClean="0"/>
+              <a:rPr lang="en-US"/>
               <a:t>Click to edit Master title style</a:t>
             </a:r>
-            <a:endParaRPr lang="en-US"/>
           </a:p>
         </p:txBody>
       </p:sp>
@@ -1534,7 +1537,7 @@
           <a:p>
             <a:pPr lvl="0"/>
             <a:r>
-              <a:rPr lang="en-US" smtClean="0"/>
+              <a:rPr lang="en-US"/>
               <a:t>Click to edit Master text styles</a:t>
             </a:r>
           </a:p>
@@ -1590,38 +1593,37 @@
           <a:p>
             <a:pPr lvl="0"/>
             <a:r>
-              <a:rPr lang="en-US" smtClean="0"/>
+              <a:rPr lang="en-US"/>
               <a:t>Click to edit Master text styles</a:t>
             </a:r>
           </a:p>
           <a:p>
             <a:pPr lvl="1"/>
             <a:r>
-              <a:rPr lang="en-US" smtClean="0"/>
+              <a:rPr lang="en-US"/>
               <a:t>Second level</a:t>
             </a:r>
           </a:p>
           <a:p>
             <a:pPr lvl="2"/>
             <a:r>
-              <a:rPr lang="en-US" smtClean="0"/>
+              <a:rPr lang="en-US"/>
               <a:t>Third level</a:t>
             </a:r>
           </a:p>
           <a:p>
             <a:pPr lvl="3"/>
             <a:r>
-              <a:rPr lang="en-US" smtClean="0"/>
+              <a:rPr lang="en-US"/>
               <a:t>Fourth level</a:t>
             </a:r>
           </a:p>
           <a:p>
             <a:pPr lvl="4"/>
             <a:r>
-              <a:rPr lang="en-US" smtClean="0"/>
+              <a:rPr lang="en-US"/>
               <a:t>Fifth level</a:t>
             </a:r>
-            <a:endParaRPr lang="en-US"/>
           </a:p>
         </p:txBody>
       </p:sp>
@@ -1684,7 +1686,7 @@
           <a:p>
             <a:pPr lvl="0"/>
             <a:r>
-              <a:rPr lang="en-US" smtClean="0"/>
+              <a:rPr lang="en-US"/>
               <a:t>Click to edit Master text styles</a:t>
             </a:r>
           </a:p>
@@ -1740,38 +1742,37 @@
           <a:p>
             <a:pPr lvl="0"/>
             <a:r>
-              <a:rPr lang="en-US" smtClean="0"/>
+              <a:rPr lang="en-US"/>
               <a:t>Click to edit Master text styles</a:t>
             </a:r>
           </a:p>
           <a:p>
             <a:pPr lvl="1"/>
             <a:r>
-              <a:rPr lang="en-US" smtClean="0"/>
+              <a:rPr lang="en-US"/>
               <a:t>Second level</a:t>
             </a:r>
           </a:p>
           <a:p>
             <a:pPr lvl="2"/>
             <a:r>
-              <a:rPr lang="en-US" smtClean="0"/>
+              <a:rPr lang="en-US"/>
               <a:t>Third level</a:t>
             </a:r>
           </a:p>
           <a:p>
             <a:pPr lvl="3"/>
             <a:r>
-              <a:rPr lang="en-US" smtClean="0"/>
+              <a:rPr lang="en-US"/>
               <a:t>Fourth level</a:t>
             </a:r>
           </a:p>
           <a:p>
             <a:pPr lvl="4"/>
             <a:r>
-              <a:rPr lang="en-US" smtClean="0"/>
+              <a:rPr lang="en-US"/>
               <a:t>Fifth level</a:t>
             </a:r>
-            <a:endParaRPr lang="en-US"/>
           </a:p>
         </p:txBody>
       </p:sp>
@@ -1792,7 +1793,7 @@
           <a:p>
             <a:fld id="{5BCAD085-E8A6-8845-BD4E-CB4CCA059FC4}" type="datetimeFigureOut">
               <a:rPr lang="en-US" smtClean="0"/>
-              <a:t>1/27/13</a:t>
+              <a:t>3/18/2026</a:t>
             </a:fld>
             <a:endParaRPr lang="en-US"/>
           </a:p>
@@ -1886,10 +1887,9 @@
           <a:lstStyle/>
           <a:p>
             <a:r>
-              <a:rPr lang="en-US" smtClean="0"/>
+              <a:rPr lang="en-US"/>
               <a:t>Click to edit Master title style</a:t>
             </a:r>
-            <a:endParaRPr lang="en-US"/>
           </a:p>
         </p:txBody>
       </p:sp>
@@ -1910,7 +1910,7 @@
           <a:p>
             <a:fld id="{5BCAD085-E8A6-8845-BD4E-CB4CCA059FC4}" type="datetimeFigureOut">
               <a:rPr lang="en-US" smtClean="0"/>
-              <a:t>1/27/13</a:t>
+              <a:t>3/18/2026</a:t>
             </a:fld>
             <a:endParaRPr lang="en-US"/>
           </a:p>
@@ -2005,7 +2005,7 @@
           <a:p>
             <a:fld id="{5BCAD085-E8A6-8845-BD4E-CB4CCA059FC4}" type="datetimeFigureOut">
               <a:rPr lang="en-US" smtClean="0"/>
-              <a:t>1/27/13</a:t>
+              <a:t>3/18/2026</a:t>
             </a:fld>
             <a:endParaRPr lang="en-US"/>
           </a:p>
@@ -2108,10 +2108,9 @@
           </a:lstStyle>
           <a:p>
             <a:r>
-              <a:rPr lang="en-US" smtClean="0"/>
+              <a:rPr lang="en-US"/>
               <a:t>Click to edit Master title style</a:t>
             </a:r>
-            <a:endParaRPr lang="en-US"/>
           </a:p>
         </p:txBody>
       </p:sp>
@@ -2165,38 +2164,37 @@
           <a:p>
             <a:pPr lvl="0"/>
             <a:r>
-              <a:rPr lang="en-US" smtClean="0"/>
+              <a:rPr lang="en-US"/>
               <a:t>Click to edit Master text styles</a:t>
             </a:r>
           </a:p>
           <a:p>
             <a:pPr lvl="1"/>
             <a:r>
-              <a:rPr lang="en-US" smtClean="0"/>
+              <a:rPr lang="en-US"/>
               <a:t>Second level</a:t>
             </a:r>
           </a:p>
           <a:p>
             <a:pPr lvl="2"/>
             <a:r>
-              <a:rPr lang="en-US" smtClean="0"/>
+              <a:rPr lang="en-US"/>
               <a:t>Third level</a:t>
             </a:r>
           </a:p>
           <a:p>
             <a:pPr lvl="3"/>
             <a:r>
-              <a:rPr lang="en-US" smtClean="0"/>
+              <a:rPr lang="en-US"/>
               <a:t>Fourth level</a:t>
             </a:r>
           </a:p>
           <a:p>
             <a:pPr lvl="4"/>
             <a:r>
-              <a:rPr lang="en-US" smtClean="0"/>
+              <a:rPr lang="en-US"/>
               <a:t>Fifth level</a:t>
             </a:r>
-            <a:endParaRPr lang="en-US"/>
           </a:p>
         </p:txBody>
       </p:sp>
@@ -2259,7 +2257,7 @@
           <a:p>
             <a:pPr lvl="0"/>
             <a:r>
-              <a:rPr lang="en-US" smtClean="0"/>
+              <a:rPr lang="en-US"/>
               <a:t>Click to edit Master text styles</a:t>
             </a:r>
           </a:p>
@@ -2282,7 +2280,7 @@
           <a:p>
             <a:fld id="{5BCAD085-E8A6-8845-BD4E-CB4CCA059FC4}" type="datetimeFigureOut">
               <a:rPr lang="en-US" smtClean="0"/>
-              <a:t>1/27/13</a:t>
+              <a:t>3/18/2026</a:t>
             </a:fld>
             <a:endParaRPr lang="en-US"/>
           </a:p>
@@ -2385,10 +2383,9 @@
           </a:lstStyle>
           <a:p>
             <a:r>
-              <a:rPr lang="en-US" smtClean="0"/>
+              <a:rPr lang="en-US"/>
               <a:t>Click to edit Master title style</a:t>
             </a:r>
-            <a:endParaRPr lang="en-US"/>
           </a:p>
         </p:txBody>
       </p:sp>
@@ -2512,7 +2509,7 @@
           <a:p>
             <a:pPr lvl="0"/>
             <a:r>
-              <a:rPr lang="en-US" smtClean="0"/>
+              <a:rPr lang="en-US"/>
               <a:t>Click to edit Master text styles</a:t>
             </a:r>
           </a:p>
@@ -2535,7 +2532,7 @@
           <a:p>
             <a:fld id="{5BCAD085-E8A6-8845-BD4E-CB4CCA059FC4}" type="datetimeFigureOut">
               <a:rPr lang="en-US" smtClean="0"/>
-              <a:t>1/27/13</a:t>
+              <a:t>3/18/2026</a:t>
             </a:fld>
             <a:endParaRPr lang="en-US"/>
           </a:p>
@@ -2644,10 +2641,9 @@
           <a:lstStyle/>
           <a:p>
             <a:r>
-              <a:rPr lang="en-US" smtClean="0"/>
+              <a:rPr lang="en-US"/>
               <a:t>Click to edit Master title style</a:t>
             </a:r>
-            <a:endParaRPr lang="en-US"/>
           </a:p>
         </p:txBody>
       </p:sp>
@@ -2678,38 +2674,37 @@
           <a:p>
             <a:pPr lvl="0"/>
             <a:r>
-              <a:rPr lang="en-US" smtClean="0"/>
+              <a:rPr lang="en-US"/>
               <a:t>Click to edit Master text styles</a:t>
             </a:r>
           </a:p>
           <a:p>
             <a:pPr lvl="1"/>
             <a:r>
-              <a:rPr lang="en-US" smtClean="0"/>
+              <a:rPr lang="en-US"/>
               <a:t>Second level</a:t>
             </a:r>
           </a:p>
           <a:p>
             <a:pPr lvl="2"/>
             <a:r>
-              <a:rPr lang="en-US" smtClean="0"/>
+              <a:rPr lang="en-US"/>
               <a:t>Third level</a:t>
             </a:r>
           </a:p>
           <a:p>
             <a:pPr lvl="3"/>
             <a:r>
-              <a:rPr lang="en-US" smtClean="0"/>
+              <a:rPr lang="en-US"/>
               <a:t>Fourth level</a:t>
             </a:r>
           </a:p>
           <a:p>
             <a:pPr lvl="4"/>
             <a:r>
-              <a:rPr lang="en-US" smtClean="0"/>
+              <a:rPr lang="en-US"/>
               <a:t>Fifth level</a:t>
             </a:r>
-            <a:endParaRPr lang="en-US"/>
           </a:p>
         </p:txBody>
       </p:sp>
@@ -2748,7 +2743,7 @@
           <a:p>
             <a:fld id="{5BCAD085-E8A6-8845-BD4E-CB4CCA059FC4}" type="datetimeFigureOut">
               <a:rPr lang="en-US" smtClean="0"/>
-              <a:t>1/27/13</a:t>
+              <a:t>3/18/2026</a:t>
             </a:fld>
             <a:endParaRPr lang="en-US"/>
           </a:p>
@@ -3107,7 +3102,7 @@
 </file>
 
 <file path=ppt/slides/slide1.xml><?xml version="1.0" encoding="utf-8"?>
-<p:sld xmlns:a="http://schemas.openxmlformats.org/drawingml/2006/main" xmlns:p="http://schemas.openxmlformats.org/presentationml/2006/main" xmlns:r="http://schemas.openxmlformats.org/officeDocument/2006/relationships">
+<p:sld xmlns:a="http://schemas.openxmlformats.org/drawingml/2006/main" xmlns:r="http://schemas.openxmlformats.org/officeDocument/2006/relationships" xmlns:p="http://schemas.openxmlformats.org/presentationml/2006/main">
   <p:cSld>
     <p:bg>
       <p:bgPr>
@@ -3123,10 +3118,23 @@
         <p:cNvGrpSpPr/>
         <p:nvPr/>
       </p:nvGrpSpPr>
-      <p:grpSpPr/>
-      <p:sp>
-        <p:nvSpPr>
-          <p:cNvPr id="2" name="Rectangle 1"/>
+      <p:grpSpPr>
+        <a:xfrm>
+          <a:off x="0" y="0"/>
+          <a:ext cx="0" cy="0"/>
+          <a:chOff x="0" y="0"/>
+          <a:chExt cx="0" cy="0"/>
+        </a:xfrm>
+      </p:grpSpPr>
+      <p:sp>
+        <p:nvSpPr>
+          <p:cNvPr id="19" name="Rectangle 18">
+            <a:extLst>
+              <a:ext uri="{FF2B5EF4-FFF2-40B4-BE49-F238E27FC236}">
+                <a16:creationId xmlns:a16="http://schemas.microsoft.com/office/drawing/2014/main" id="{631EE012-012D-5E88-0E1D-D2187C3932AD}"/>
+              </a:ext>
+            </a:extLst>
+          </p:cNvPr>
           <p:cNvSpPr/>
           <p:nvPr/>
         </p:nvSpPr>
@@ -3164,12 +3172,19 @@
           <a:lstStyle/>
           <a:p>
             <a:pPr algn="ctr"/>
-          </a:p>
-        </p:txBody>
-      </p:sp>
-      <p:sp>
-        <p:nvSpPr>
-          <p:cNvPr id="3" name="Rectangle 2"/>
+            <a:endParaRPr/>
+          </a:p>
+        </p:txBody>
+      </p:sp>
+      <p:sp>
+        <p:nvSpPr>
+          <p:cNvPr id="20" name="Rectangle 19">
+            <a:extLst>
+              <a:ext uri="{FF2B5EF4-FFF2-40B4-BE49-F238E27FC236}">
+                <a16:creationId xmlns:a16="http://schemas.microsoft.com/office/drawing/2014/main" id="{B105652F-866B-1D39-C624-54E99CBAF676}"/>
+              </a:ext>
+            </a:extLst>
+          </p:cNvPr>
           <p:cNvSpPr/>
           <p:nvPr/>
         </p:nvSpPr>
@@ -3207,12 +3222,19 @@
           <a:lstStyle/>
           <a:p>
             <a:pPr algn="ctr"/>
-          </a:p>
-        </p:txBody>
-      </p:sp>
-      <p:sp>
-        <p:nvSpPr>
-          <p:cNvPr id="4" name="TextBox 3"/>
+            <a:endParaRPr/>
+          </a:p>
+        </p:txBody>
+      </p:sp>
+      <p:sp>
+        <p:nvSpPr>
+          <p:cNvPr id="21" name="TextBox 20">
+            <a:extLst>
+              <a:ext uri="{FF2B5EF4-FFF2-40B4-BE49-F238E27FC236}">
+                <a16:creationId xmlns:a16="http://schemas.microsoft.com/office/drawing/2014/main" id="{3D29F2C5-17AD-41A6-C82A-9A95798FE65C}"/>
+              </a:ext>
+            </a:extLst>
+          </p:cNvPr>
           <p:cNvSpPr txBox="1"/>
           <p:nvPr/>
         </p:nvSpPr>
@@ -3241,10 +3263,14 @@
               </a:defRPr>
             </a:pPr>
             <a:r>
+              <a:rPr dirty="0"/>
               <a:t>COMPARATIVE STUDY OF STOCHASTIC MODELS</a:t>
             </a:r>
-            <a:br/>
-            <a:r>
+            <a:br>
+              <a:rPr dirty="0"/>
+            </a:br>
+            <a:r>
+              <a:rPr dirty="0"/>
               <a:t>FOR OPTION PRICING</a:t>
             </a:r>
           </a:p>
@@ -3252,7 +3278,13 @@
       </p:sp>
       <p:sp>
         <p:nvSpPr>
-          <p:cNvPr id="5" name="TextBox 4"/>
+          <p:cNvPr id="22" name="TextBox 21">
+            <a:extLst>
+              <a:ext uri="{FF2B5EF4-FFF2-40B4-BE49-F238E27FC236}">
+                <a16:creationId xmlns:a16="http://schemas.microsoft.com/office/drawing/2014/main" id="{9ACF5CB0-8105-2958-A121-4D4D861780FA}"/>
+              </a:ext>
+            </a:extLst>
+          </p:cNvPr>
           <p:cNvSpPr txBox="1"/>
           <p:nvPr/>
         </p:nvSpPr>
@@ -3273,7 +3305,7 @@
           <a:lstStyle/>
           <a:p>
             <a:pPr algn="ctr">
-              <a:defRPr sz="2200" b="0">
+              <a:defRPr sz="2400" b="0">
                 <a:solidFill>
                   <a:srgbClr val="D4A02F"/>
                 </a:solidFill>
@@ -3281,14 +3313,20 @@
               </a:defRPr>
             </a:pPr>
             <a:r>
-              <a:t>Focus: Black–Scholes vs Merton Jump–Diffusion on NIFTY 50</a:t>
-            </a:r>
-          </a:p>
-        </p:txBody>
-      </p:sp>
-      <p:sp>
-        <p:nvSpPr>
-          <p:cNvPr id="6" name="Rectangle 5"/>
+              <a:t>In the Indian Stock Market (NIFTY 50)</a:t>
+            </a:r>
+          </a:p>
+        </p:txBody>
+      </p:sp>
+      <p:sp>
+        <p:nvSpPr>
+          <p:cNvPr id="23" name="Rectangle 22">
+            <a:extLst>
+              <a:ext uri="{FF2B5EF4-FFF2-40B4-BE49-F238E27FC236}">
+                <a16:creationId xmlns:a16="http://schemas.microsoft.com/office/drawing/2014/main" id="{53BA5970-6918-F7C2-F11D-5E8E7C39D113}"/>
+              </a:ext>
+            </a:extLst>
+          </p:cNvPr>
           <p:cNvSpPr/>
           <p:nvPr/>
         </p:nvSpPr>
@@ -3326,19 +3364,26 @@
           <a:lstStyle/>
           <a:p>
             <a:pPr algn="ctr"/>
-          </a:p>
-        </p:txBody>
-      </p:sp>
-      <p:sp>
-        <p:nvSpPr>
-          <p:cNvPr id="7" name="TextBox 6"/>
+            <a:endParaRPr/>
+          </a:p>
+        </p:txBody>
+      </p:sp>
+      <p:sp>
+        <p:nvSpPr>
+          <p:cNvPr id="24" name="TextBox 23">
+            <a:extLst>
+              <a:ext uri="{FF2B5EF4-FFF2-40B4-BE49-F238E27FC236}">
+                <a16:creationId xmlns:a16="http://schemas.microsoft.com/office/drawing/2014/main" id="{8ECA59F5-A157-0266-7506-73FB419A012F}"/>
+              </a:ext>
+            </a:extLst>
+          </p:cNvPr>
           <p:cNvSpPr txBox="1"/>
           <p:nvPr/>
         </p:nvSpPr>
         <p:spPr>
           <a:xfrm>
-            <a:off x="1371600" y="4572000"/>
-            <a:ext cx="9144000" cy="365760"/>
+            <a:off x="1371600" y="3566160"/>
+            <a:ext cx="9144000" cy="457200"/>
           </a:xfrm>
           <a:prstGeom prst="rect">
             <a:avLst/>
@@ -3352,28 +3397,34 @@
           <a:lstStyle/>
           <a:p>
             <a:pPr algn="ctr">
-              <a:defRPr sz="1600" b="0">
-                <a:solidFill>
-                  <a:srgbClr val="99BBDD"/>
-                </a:solidFill>
-                <a:latin typeface="Calibri"/>
-              </a:defRPr>
-            </a:pPr>
-            <a:r>
-              <a:t>Project Report | Academic Year 2025–26</a:t>
-            </a:r>
-          </a:p>
-        </p:txBody>
-      </p:sp>
-      <p:sp>
-        <p:nvSpPr>
-          <p:cNvPr id="8" name="TextBox 7"/>
+              <a:defRPr sz="1800" b="0">
+                <a:solidFill>
+                  <a:srgbClr val="AACCEE"/>
+                </a:solidFill>
+                <a:latin typeface="Calibri"/>
+              </a:defRPr>
+            </a:pPr>
+            <a:r>
+              <a:t>Black-Scholes  →  Merton Jump-Diffusion  →  Heston  →  Bates</a:t>
+            </a:r>
+          </a:p>
+        </p:txBody>
+      </p:sp>
+      <p:sp>
+        <p:nvSpPr>
+          <p:cNvPr id="25" name="TextBox 24">
+            <a:extLst>
+              <a:ext uri="{FF2B5EF4-FFF2-40B4-BE49-F238E27FC236}">
+                <a16:creationId xmlns:a16="http://schemas.microsoft.com/office/drawing/2014/main" id="{7883765A-F09F-FE85-2F03-1A8B5DAADD2E}"/>
+              </a:ext>
+            </a:extLst>
+          </p:cNvPr>
           <p:cNvSpPr txBox="1"/>
           <p:nvPr/>
         </p:nvSpPr>
         <p:spPr>
           <a:xfrm>
-            <a:off x="1371600" y="5120640"/>
+            <a:off x="1371600" y="4572000"/>
             <a:ext cx="9144000" cy="365760"/>
           </a:xfrm>
           <a:prstGeom prst="rect">
@@ -3388,6 +3439,48 @@
           <a:lstStyle/>
           <a:p>
             <a:pPr algn="ctr">
+              <a:defRPr sz="1600" b="0">
+                <a:solidFill>
+                  <a:srgbClr val="99BBDD"/>
+                </a:solidFill>
+                <a:latin typeface="Calibri"/>
+              </a:defRPr>
+            </a:pPr>
+            <a:r>
+              <a:t>Project Report | Mid-Term Evaluation | Academic Year 2025-26</a:t>
+            </a:r>
+          </a:p>
+        </p:txBody>
+      </p:sp>
+      <p:sp>
+        <p:nvSpPr>
+          <p:cNvPr id="26" name="TextBox 25">
+            <a:extLst>
+              <a:ext uri="{FF2B5EF4-FFF2-40B4-BE49-F238E27FC236}">
+                <a16:creationId xmlns:a16="http://schemas.microsoft.com/office/drawing/2014/main" id="{6652AA55-DC97-D77D-2C7F-2956B10A46D2}"/>
+              </a:ext>
+            </a:extLst>
+          </p:cNvPr>
+          <p:cNvSpPr txBox="1"/>
+          <p:nvPr/>
+        </p:nvSpPr>
+        <p:spPr>
+          <a:xfrm>
+            <a:off x="1371600" y="5120640"/>
+            <a:ext cx="9144000" cy="365760"/>
+          </a:xfrm>
+          <a:prstGeom prst="rect">
+            <a:avLst/>
+          </a:prstGeom>
+          <a:noFill/>
+        </p:spPr>
+        <p:txBody>
+          <a:bodyPr wrap="square">
+            <a:spAutoFit/>
+          </a:bodyPr>
+          <a:lstStyle/>
+          <a:p>
+            <a:pPr algn="ctr">
               <a:defRPr sz="1800" b="1">
                 <a:solidFill>
                   <a:srgbClr val="FFFFFF"/>
@@ -3396,14 +3489,20 @@
               </a:defRPr>
             </a:pPr>
             <a:r>
-              <a:t>Under supervision of Prof. Chaman Kumar</a:t>
-            </a:r>
-          </a:p>
-        </p:txBody>
-      </p:sp>
-      <p:sp>
-        <p:nvSpPr>
-          <p:cNvPr id="9" name="TextBox 8"/>
+              <a:t>Under the supervision of Prof. Chaman Kumar</a:t>
+            </a:r>
+          </a:p>
+        </p:txBody>
+      </p:sp>
+      <p:sp>
+        <p:nvSpPr>
+          <p:cNvPr id="27" name="TextBox 26">
+            <a:extLst>
+              <a:ext uri="{FF2B5EF4-FFF2-40B4-BE49-F238E27FC236}">
+                <a16:creationId xmlns:a16="http://schemas.microsoft.com/office/drawing/2014/main" id="{BE99ABE2-0324-7D5C-579A-04C45E03A0EC}"/>
+              </a:ext>
+            </a:extLst>
+          </p:cNvPr>
           <p:cNvSpPr txBox="1"/>
           <p:nvPr/>
         </p:nvSpPr>
@@ -3446,7 +3545,7 @@
 </file>
 
 <file path=ppt/slides/slide10.xml><?xml version="1.0" encoding="utf-8"?>
-<p:sld xmlns:a="http://schemas.openxmlformats.org/drawingml/2006/main" xmlns:p="http://schemas.openxmlformats.org/presentationml/2006/main" xmlns:r="http://schemas.openxmlformats.org/officeDocument/2006/relationships">
+<p:sld xmlns:a="http://schemas.openxmlformats.org/drawingml/2006/main" xmlns:r="http://schemas.openxmlformats.org/officeDocument/2006/relationships" xmlns:p="http://schemas.openxmlformats.org/presentationml/2006/main">
   <p:cSld>
     <p:bg>
       <p:bgPr>
@@ -3462,7 +3561,14 @@
         <p:cNvGrpSpPr/>
         <p:nvPr/>
       </p:nvGrpSpPr>
-      <p:grpSpPr/>
+      <p:grpSpPr>
+        <a:xfrm>
+          <a:off x="0" y="0"/>
+          <a:ext cx="0" cy="0"/>
+          <a:chOff x="0" y="0"/>
+          <a:chExt cx="0" cy="0"/>
+        </a:xfrm>
+      </p:grpSpPr>
       <p:sp>
         <p:nvSpPr>
           <p:cNvPr id="2" name="Rectangle 1"/>
@@ -3503,6 +3609,7 @@
           <a:lstStyle/>
           <a:p>
             <a:pPr algn="ctr"/>
+            <a:endParaRPr/>
           </a:p>
         </p:txBody>
       </p:sp>
@@ -3582,6 +3689,7 @@
           <a:lstStyle/>
           <a:p>
             <a:pPr algn="ctr"/>
+            <a:endParaRPr/>
           </a:p>
         </p:txBody>
       </p:sp>
@@ -3667,7 +3775,7 @@
 </file>
 
 <file path=ppt/slides/slide11.xml><?xml version="1.0" encoding="utf-8"?>
-<p:sld xmlns:a="http://schemas.openxmlformats.org/drawingml/2006/main" xmlns:p="http://schemas.openxmlformats.org/presentationml/2006/main" xmlns:r="http://schemas.openxmlformats.org/officeDocument/2006/relationships">
+<p:sld xmlns:a="http://schemas.openxmlformats.org/drawingml/2006/main" xmlns:r="http://schemas.openxmlformats.org/officeDocument/2006/relationships" xmlns:p="http://schemas.openxmlformats.org/presentationml/2006/main">
   <p:cSld>
     <p:bg>
       <p:bgPr>
@@ -3683,7 +3791,14 @@
         <p:cNvGrpSpPr/>
         <p:nvPr/>
       </p:nvGrpSpPr>
-      <p:grpSpPr/>
+      <p:grpSpPr>
+        <a:xfrm>
+          <a:off x="0" y="0"/>
+          <a:ext cx="0" cy="0"/>
+          <a:chOff x="0" y="0"/>
+          <a:chExt cx="0" cy="0"/>
+        </a:xfrm>
+      </p:grpSpPr>
       <p:sp>
         <p:nvSpPr>
           <p:cNvPr id="2" name="Rectangle 1"/>
@@ -3724,6 +3839,7 @@
           <a:lstStyle/>
           <a:p>
             <a:pPr algn="ctr"/>
+            <a:endParaRPr/>
           </a:p>
         </p:txBody>
       </p:sp>
@@ -3803,6 +3919,7 @@
           <a:lstStyle/>
           <a:p>
             <a:pPr algn="ctr"/>
+            <a:endParaRPr/>
           </a:p>
         </p:txBody>
       </p:sp>
@@ -3888,7 +4005,7 @@
 </file>
 
 <file path=ppt/slides/slide12.xml><?xml version="1.0" encoding="utf-8"?>
-<p:sld xmlns:a="http://schemas.openxmlformats.org/drawingml/2006/main" xmlns:p="http://schemas.openxmlformats.org/presentationml/2006/main" xmlns:r="http://schemas.openxmlformats.org/officeDocument/2006/relationships">
+<p:sld xmlns:a="http://schemas.openxmlformats.org/drawingml/2006/main" xmlns:r="http://schemas.openxmlformats.org/officeDocument/2006/relationships" xmlns:p="http://schemas.openxmlformats.org/presentationml/2006/main">
   <p:cSld>
     <p:bg>
       <p:bgPr>
@@ -3904,7 +4021,14 @@
         <p:cNvGrpSpPr/>
         <p:nvPr/>
       </p:nvGrpSpPr>
-      <p:grpSpPr/>
+      <p:grpSpPr>
+        <a:xfrm>
+          <a:off x="0" y="0"/>
+          <a:ext cx="0" cy="0"/>
+          <a:chOff x="0" y="0"/>
+          <a:chExt cx="0" cy="0"/>
+        </a:xfrm>
+      </p:grpSpPr>
       <p:sp>
         <p:nvSpPr>
           <p:cNvPr id="2" name="Rectangle 1"/>
@@ -3945,6 +4069,7 @@
           <a:lstStyle/>
           <a:p>
             <a:pPr algn="ctr"/>
+            <a:endParaRPr/>
           </a:p>
         </p:txBody>
       </p:sp>
@@ -4024,6 +4149,7 @@
           <a:lstStyle/>
           <a:p>
             <a:pPr algn="ctr"/>
+            <a:endParaRPr/>
           </a:p>
         </p:txBody>
       </p:sp>
@@ -4122,7 +4248,7 @@
 </file>
 
 <file path=ppt/slides/slide13.xml><?xml version="1.0" encoding="utf-8"?>
-<p:sld xmlns:a="http://schemas.openxmlformats.org/drawingml/2006/main" xmlns:p="http://schemas.openxmlformats.org/presentationml/2006/main" xmlns:r="http://schemas.openxmlformats.org/officeDocument/2006/relationships">
+<p:sld xmlns:a="http://schemas.openxmlformats.org/drawingml/2006/main" xmlns:r="http://schemas.openxmlformats.org/officeDocument/2006/relationships" xmlns:p="http://schemas.openxmlformats.org/presentationml/2006/main">
   <p:cSld>
     <p:bg>
       <p:bgPr>
@@ -4138,7 +4264,14 @@
         <p:cNvGrpSpPr/>
         <p:nvPr/>
       </p:nvGrpSpPr>
-      <p:grpSpPr/>
+      <p:grpSpPr>
+        <a:xfrm>
+          <a:off x="0" y="0"/>
+          <a:ext cx="0" cy="0"/>
+          <a:chOff x="0" y="0"/>
+          <a:chExt cx="0" cy="0"/>
+        </a:xfrm>
+      </p:grpSpPr>
       <p:sp>
         <p:nvSpPr>
           <p:cNvPr id="2" name="Rectangle 1"/>
@@ -4179,6 +4312,7 @@
           <a:lstStyle/>
           <a:p>
             <a:pPr algn="ctr"/>
+            <a:endParaRPr/>
           </a:p>
         </p:txBody>
       </p:sp>
@@ -4258,6 +4392,7 @@
           <a:lstStyle/>
           <a:p>
             <a:pPr algn="ctr"/>
+            <a:endParaRPr/>
           </a:p>
         </p:txBody>
       </p:sp>
@@ -4343,7 +4478,7 @@
 </file>
 
 <file path=ppt/slides/slide14.xml><?xml version="1.0" encoding="utf-8"?>
-<p:sld xmlns:a="http://schemas.openxmlformats.org/drawingml/2006/main" xmlns:p="http://schemas.openxmlformats.org/presentationml/2006/main" xmlns:r="http://schemas.openxmlformats.org/officeDocument/2006/relationships">
+<p:sld xmlns:a="http://schemas.openxmlformats.org/drawingml/2006/main" xmlns:r="http://schemas.openxmlformats.org/officeDocument/2006/relationships" xmlns:p="http://schemas.openxmlformats.org/presentationml/2006/main">
   <p:cSld>
     <p:bg>
       <p:bgPr>
@@ -4359,7 +4494,14 @@
         <p:cNvGrpSpPr/>
         <p:nvPr/>
       </p:nvGrpSpPr>
-      <p:grpSpPr/>
+      <p:grpSpPr>
+        <a:xfrm>
+          <a:off x="0" y="0"/>
+          <a:ext cx="0" cy="0"/>
+          <a:chOff x="0" y="0"/>
+          <a:chExt cx="0" cy="0"/>
+        </a:xfrm>
+      </p:grpSpPr>
       <p:sp>
         <p:nvSpPr>
           <p:cNvPr id="2" name="Rectangle 1"/>
@@ -4400,6 +4542,7 @@
           <a:lstStyle/>
           <a:p>
             <a:pPr algn="ctr"/>
+            <a:endParaRPr/>
           </a:p>
         </p:txBody>
       </p:sp>
@@ -4479,6 +4622,7 @@
           <a:lstStyle/>
           <a:p>
             <a:pPr algn="ctr"/>
+            <a:endParaRPr/>
           </a:p>
         </p:txBody>
       </p:sp>
@@ -4564,7 +4708,7 @@
 </file>
 
 <file path=ppt/slides/slide15.xml><?xml version="1.0" encoding="utf-8"?>
-<p:sld xmlns:a="http://schemas.openxmlformats.org/drawingml/2006/main" xmlns:p="http://schemas.openxmlformats.org/presentationml/2006/main" xmlns:r="http://schemas.openxmlformats.org/officeDocument/2006/relationships">
+<p:sld xmlns:a="http://schemas.openxmlformats.org/drawingml/2006/main" xmlns:r="http://schemas.openxmlformats.org/officeDocument/2006/relationships" xmlns:p="http://schemas.openxmlformats.org/presentationml/2006/main">
   <p:cSld>
     <p:bg>
       <p:bgPr>
@@ -4580,7 +4724,14 @@
         <p:cNvGrpSpPr/>
         <p:nvPr/>
       </p:nvGrpSpPr>
-      <p:grpSpPr/>
+      <p:grpSpPr>
+        <a:xfrm>
+          <a:off x="0" y="0"/>
+          <a:ext cx="0" cy="0"/>
+          <a:chOff x="0" y="0"/>
+          <a:chExt cx="0" cy="0"/>
+        </a:xfrm>
+      </p:grpSpPr>
       <p:sp>
         <p:nvSpPr>
           <p:cNvPr id="2" name="Rectangle 1"/>
@@ -4621,6 +4772,7 @@
           <a:lstStyle/>
           <a:p>
             <a:pPr algn="ctr"/>
+            <a:endParaRPr/>
           </a:p>
         </p:txBody>
       </p:sp>
@@ -4700,6 +4852,7 @@
           <a:lstStyle/>
           <a:p>
             <a:pPr algn="ctr"/>
+            <a:endParaRPr/>
           </a:p>
         </p:txBody>
       </p:sp>
@@ -4785,7 +4938,7 @@
 </file>
 
 <file path=ppt/slides/slide16.xml><?xml version="1.0" encoding="utf-8"?>
-<p:sld xmlns:a="http://schemas.openxmlformats.org/drawingml/2006/main" xmlns:p="http://schemas.openxmlformats.org/presentationml/2006/main" xmlns:r="http://schemas.openxmlformats.org/officeDocument/2006/relationships">
+<p:sld xmlns:a="http://schemas.openxmlformats.org/drawingml/2006/main" xmlns:r="http://schemas.openxmlformats.org/officeDocument/2006/relationships" xmlns:p="http://schemas.openxmlformats.org/presentationml/2006/main">
   <p:cSld>
     <p:bg>
       <p:bgPr>
@@ -4801,7 +4954,14 @@
         <p:cNvGrpSpPr/>
         <p:nvPr/>
       </p:nvGrpSpPr>
-      <p:grpSpPr/>
+      <p:grpSpPr>
+        <a:xfrm>
+          <a:off x="0" y="0"/>
+          <a:ext cx="0" cy="0"/>
+          <a:chOff x="0" y="0"/>
+          <a:chExt cx="0" cy="0"/>
+        </a:xfrm>
+      </p:grpSpPr>
       <p:sp>
         <p:nvSpPr>
           <p:cNvPr id="2" name="Rectangle 1"/>
@@ -4842,6 +5002,7 @@
           <a:lstStyle/>
           <a:p>
             <a:pPr algn="ctr"/>
+            <a:endParaRPr/>
           </a:p>
         </p:txBody>
       </p:sp>
@@ -4921,6 +5082,7 @@
           <a:lstStyle/>
           <a:p>
             <a:pPr algn="ctr"/>
+            <a:endParaRPr/>
           </a:p>
         </p:txBody>
       </p:sp>
@@ -4940,8 +5102,8 @@
         </p:blipFill>
         <p:spPr>
           <a:xfrm>
-            <a:off x="274320" y="1097280"/>
-            <a:ext cx="11430000" cy="7377764"/>
+            <a:off x="2011680" y="1024128"/>
+            <a:ext cx="8316686" cy="5368202"/>
           </a:xfrm>
           <a:prstGeom prst="rect">
             <a:avLst/>
@@ -5006,7 +5168,7 @@
 </file>
 
 <file path=ppt/slides/slide17.xml><?xml version="1.0" encoding="utf-8"?>
-<p:sld xmlns:a="http://schemas.openxmlformats.org/drawingml/2006/main" xmlns:p="http://schemas.openxmlformats.org/presentationml/2006/main" xmlns:r="http://schemas.openxmlformats.org/officeDocument/2006/relationships">
+<p:sld xmlns:a="http://schemas.openxmlformats.org/drawingml/2006/main" xmlns:r="http://schemas.openxmlformats.org/officeDocument/2006/relationships" xmlns:p="http://schemas.openxmlformats.org/presentationml/2006/main">
   <p:cSld>
     <p:bg>
       <p:bgPr>
@@ -5022,7 +5184,14 @@
         <p:cNvGrpSpPr/>
         <p:nvPr/>
       </p:nvGrpSpPr>
-      <p:grpSpPr/>
+      <p:grpSpPr>
+        <a:xfrm>
+          <a:off x="0" y="0"/>
+          <a:ext cx="0" cy="0"/>
+          <a:chOff x="0" y="0"/>
+          <a:chExt cx="0" cy="0"/>
+        </a:xfrm>
+      </p:grpSpPr>
       <p:sp>
         <p:nvSpPr>
           <p:cNvPr id="2" name="Rectangle 1"/>
@@ -5063,6 +5232,7 @@
           <a:lstStyle/>
           <a:p>
             <a:pPr algn="ctr"/>
+            <a:endParaRPr/>
           </a:p>
         </p:txBody>
       </p:sp>
@@ -5142,6 +5312,7 @@
           <a:lstStyle/>
           <a:p>
             <a:pPr algn="ctr"/>
+            <a:endParaRPr/>
           </a:p>
         </p:txBody>
       </p:sp>
@@ -5227,7 +5398,7 @@
 </file>
 
 <file path=ppt/slides/slide18.xml><?xml version="1.0" encoding="utf-8"?>
-<p:sld xmlns:a="http://schemas.openxmlformats.org/drawingml/2006/main" xmlns:p="http://schemas.openxmlformats.org/presentationml/2006/main" xmlns:r="http://schemas.openxmlformats.org/officeDocument/2006/relationships">
+<p:sld xmlns:a="http://schemas.openxmlformats.org/drawingml/2006/main" xmlns:r="http://schemas.openxmlformats.org/officeDocument/2006/relationships" xmlns:p="http://schemas.openxmlformats.org/presentationml/2006/main">
   <p:cSld>
     <p:bg>
       <p:bgPr>
@@ -5243,7 +5414,14 @@
         <p:cNvGrpSpPr/>
         <p:nvPr/>
       </p:nvGrpSpPr>
-      <p:grpSpPr/>
+      <p:grpSpPr>
+        <a:xfrm>
+          <a:off x="0" y="0"/>
+          <a:ext cx="0" cy="0"/>
+          <a:chOff x="0" y="0"/>
+          <a:chExt cx="0" cy="0"/>
+        </a:xfrm>
+      </p:grpSpPr>
       <p:sp>
         <p:nvSpPr>
           <p:cNvPr id="2" name="Rectangle 1"/>
@@ -5284,6 +5462,7 @@
           <a:lstStyle/>
           <a:p>
             <a:pPr algn="ctr"/>
+            <a:endParaRPr/>
           </a:p>
         </p:txBody>
       </p:sp>
@@ -5363,6 +5542,7 @@
           <a:lstStyle/>
           <a:p>
             <a:pPr algn="ctr"/>
+            <a:endParaRPr/>
           </a:p>
         </p:txBody>
       </p:sp>
@@ -5448,7 +5628,7 @@
 </file>
 
 <file path=ppt/slides/slide19.xml><?xml version="1.0" encoding="utf-8"?>
-<p:sld xmlns:a="http://schemas.openxmlformats.org/drawingml/2006/main" xmlns:p="http://schemas.openxmlformats.org/presentationml/2006/main" xmlns:r="http://schemas.openxmlformats.org/officeDocument/2006/relationships">
+<p:sld xmlns:a="http://schemas.openxmlformats.org/drawingml/2006/main" xmlns:r="http://schemas.openxmlformats.org/officeDocument/2006/relationships" xmlns:p="http://schemas.openxmlformats.org/presentationml/2006/main">
   <p:cSld>
     <p:bg>
       <p:bgPr>
@@ -5464,7 +5644,14 @@
         <p:cNvGrpSpPr/>
         <p:nvPr/>
       </p:nvGrpSpPr>
-      <p:grpSpPr/>
+      <p:grpSpPr>
+        <a:xfrm>
+          <a:off x="0" y="0"/>
+          <a:ext cx="0" cy="0"/>
+          <a:chOff x="0" y="0"/>
+          <a:chExt cx="0" cy="0"/>
+        </a:xfrm>
+      </p:grpSpPr>
       <p:sp>
         <p:nvSpPr>
           <p:cNvPr id="2" name="Rectangle 1"/>
@@ -5505,6 +5692,7 @@
           <a:lstStyle/>
           <a:p>
             <a:pPr algn="ctr"/>
+            <a:endParaRPr/>
           </a:p>
         </p:txBody>
       </p:sp>
@@ -5584,6 +5772,7 @@
           <a:lstStyle/>
           <a:p>
             <a:pPr algn="ctr"/>
+            <a:endParaRPr/>
           </a:p>
         </p:txBody>
       </p:sp>
@@ -5682,7 +5871,7 @@
 </file>
 
 <file path=ppt/slides/slide2.xml><?xml version="1.0" encoding="utf-8"?>
-<p:sld xmlns:a="http://schemas.openxmlformats.org/drawingml/2006/main" xmlns:p="http://schemas.openxmlformats.org/presentationml/2006/main" xmlns:r="http://schemas.openxmlformats.org/officeDocument/2006/relationships">
+<p:sld xmlns:a="http://schemas.openxmlformats.org/drawingml/2006/main" xmlns:r="http://schemas.openxmlformats.org/officeDocument/2006/relationships" xmlns:p="http://schemas.openxmlformats.org/presentationml/2006/main">
   <p:cSld>
     <p:bg>
       <p:bgPr>
@@ -5698,7 +5887,14 @@
         <p:cNvGrpSpPr/>
         <p:nvPr/>
       </p:nvGrpSpPr>
-      <p:grpSpPr/>
+      <p:grpSpPr>
+        <a:xfrm>
+          <a:off x="0" y="0"/>
+          <a:ext cx="0" cy="0"/>
+          <a:chOff x="0" y="0"/>
+          <a:chExt cx="0" cy="0"/>
+        </a:xfrm>
+      </p:grpSpPr>
       <p:sp>
         <p:nvSpPr>
           <p:cNvPr id="2" name="Rectangle 1"/>
@@ -5739,6 +5935,7 @@
           <a:lstStyle/>
           <a:p>
             <a:pPr algn="ctr"/>
+            <a:endParaRPr/>
           </a:p>
         </p:txBody>
       </p:sp>
@@ -5818,6 +6015,7 @@
           <a:lstStyle/>
           <a:p>
             <a:pPr algn="ctr"/>
+            <a:endParaRPr/>
           </a:p>
         </p:txBody>
       </p:sp>
@@ -5852,7 +6050,16 @@
               </a:defRPr>
             </a:pPr>
             <a:r>
-              <a:t>1. Motivation &amp; empirical stylised facts (Indian market)</a:t>
+              <a:rPr dirty="0"/>
+              <a:t>1. Motivation &amp; empirical </a:t>
+            </a:r>
+            <a:r>
+              <a:rPr dirty="0" err="1"/>
+              <a:t>stylised</a:t>
+            </a:r>
+            <a:r>
+              <a:rPr dirty="0"/>
+              <a:t> facts (Indian market)</a:t>
             </a:r>
           </a:p>
           <a:p>
@@ -5865,6 +6072,7 @@
               </a:defRPr>
             </a:pPr>
             <a:r>
+              <a:rPr dirty="0"/>
               <a:t>2. Data: NIFTY 50 (2018–2024)</a:t>
             </a:r>
           </a:p>
@@ -5878,6 +6086,7 @@
               </a:defRPr>
             </a:pPr>
             <a:r>
+              <a:rPr dirty="0"/>
               <a:t>3. Black–Scholes model:</a:t>
             </a:r>
           </a:p>
@@ -5891,6 +6100,7 @@
               </a:defRPr>
             </a:pPr>
             <a:r>
+              <a:rPr dirty="0"/>
               <a:t>   • GBM SDE and log‑price solution</a:t>
             </a:r>
           </a:p>
@@ -5904,6 +6114,7 @@
               </a:defRPr>
             </a:pPr>
             <a:r>
+              <a:rPr dirty="0"/>
               <a:t>   • Maximum Likelihood Estimation (MLE)</a:t>
             </a:r>
           </a:p>
@@ -5917,6 +6128,7 @@
               </a:defRPr>
             </a:pPr>
             <a:r>
+              <a:rPr dirty="0"/>
               <a:t>   • Closed‑form pricing &amp; Monte Carlo</a:t>
             </a:r>
           </a:p>
@@ -5953,6 +6165,7 @@
               </a:defRPr>
             </a:pPr>
             <a:r>
+              <a:rPr dirty="0"/>
               <a:t>4. Merton Jump–Diffusion:</a:t>
             </a:r>
           </a:p>
@@ -5966,6 +6179,7 @@
               </a:defRPr>
             </a:pPr>
             <a:r>
+              <a:rPr dirty="0"/>
               <a:t>   • SDE with jumps and log‑return derivation</a:t>
             </a:r>
           </a:p>
@@ -5979,6 +6193,7 @@
               </a:defRPr>
             </a:pPr>
             <a:r>
+              <a:rPr dirty="0"/>
               <a:t>   • Gaussian‑mixture likelihood &amp; MLE</a:t>
             </a:r>
           </a:p>
@@ -5992,6 +6207,7 @@
               </a:defRPr>
             </a:pPr>
             <a:r>
+              <a:rPr dirty="0"/>
               <a:t>5. Evidence from NIFTY 50:</a:t>
             </a:r>
           </a:p>
@@ -6005,7 +6221,16 @@
               </a:defRPr>
             </a:pPr>
             <a:r>
-              <a:t>   • Fat tails, VaR failures, volatility smile</a:t>
+              <a:rPr dirty="0"/>
+              <a:t>   • Fat tails, </a:t>
+            </a:r>
+            <a:r>
+              <a:rPr dirty="0" err="1"/>
+              <a:t>VaR</a:t>
+            </a:r>
+            <a:r>
+              <a:rPr dirty="0"/>
+              <a:t> failures, volatility smile</a:t>
             </a:r>
           </a:p>
           <a:p>
@@ -6018,6 +6243,7 @@
               </a:defRPr>
             </a:pPr>
             <a:r>
+              <a:rPr dirty="0"/>
               <a:t>6. Model selection (LRT, AIC/BIC) &amp; future work (Heston/Bates)</a:t>
             </a:r>
           </a:p>
@@ -6032,7 +6258,7 @@
 </file>
 
 <file path=ppt/slides/slide20.xml><?xml version="1.0" encoding="utf-8"?>
-<p:sld xmlns:a="http://schemas.openxmlformats.org/drawingml/2006/main" xmlns:p="http://schemas.openxmlformats.org/presentationml/2006/main" xmlns:r="http://schemas.openxmlformats.org/officeDocument/2006/relationships">
+<p:sld xmlns:a="http://schemas.openxmlformats.org/drawingml/2006/main" xmlns:r="http://schemas.openxmlformats.org/officeDocument/2006/relationships" xmlns:p="http://schemas.openxmlformats.org/presentationml/2006/main">
   <p:cSld>
     <p:bg>
       <p:bgPr>
@@ -6048,7 +6274,14 @@
         <p:cNvGrpSpPr/>
         <p:nvPr/>
       </p:nvGrpSpPr>
-      <p:grpSpPr/>
+      <p:grpSpPr>
+        <a:xfrm>
+          <a:off x="0" y="0"/>
+          <a:ext cx="0" cy="0"/>
+          <a:chOff x="0" y="0"/>
+          <a:chExt cx="0" cy="0"/>
+        </a:xfrm>
+      </p:grpSpPr>
       <p:sp>
         <p:nvSpPr>
           <p:cNvPr id="2" name="Rectangle 1"/>
@@ -6089,6 +6322,7 @@
           <a:lstStyle/>
           <a:p>
             <a:pPr algn="ctr"/>
+            <a:endParaRPr/>
           </a:p>
         </p:txBody>
       </p:sp>
@@ -6168,6 +6402,7 @@
           <a:lstStyle/>
           <a:p>
             <a:pPr algn="ctr"/>
+            <a:endParaRPr/>
           </a:p>
         </p:txBody>
       </p:sp>
@@ -6253,6 +6488,7 @@
                 <a:latin typeface="Calibri"/>
               </a:defRPr>
             </a:pPr>
+            <a:endParaRPr/>
           </a:p>
           <a:p>
             <a:pPr>
@@ -6289,6 +6525,7 @@
                 <a:latin typeface="Calibri"/>
               </a:defRPr>
             </a:pPr>
+            <a:endParaRPr/>
           </a:p>
           <a:p>
             <a:pPr>
@@ -6325,6 +6562,7 @@
                 <a:latin typeface="Calibri"/>
               </a:defRPr>
             </a:pPr>
+            <a:endParaRPr/>
           </a:p>
           <a:p>
             <a:pPr>
@@ -6374,7 +6612,7 @@
 </file>
 
 <file path=ppt/slides/slide21.xml><?xml version="1.0" encoding="utf-8"?>
-<p:sld xmlns:a="http://schemas.openxmlformats.org/drawingml/2006/main" xmlns:p="http://schemas.openxmlformats.org/presentationml/2006/main" xmlns:r="http://schemas.openxmlformats.org/officeDocument/2006/relationships">
+<p:sld xmlns:a="http://schemas.openxmlformats.org/drawingml/2006/main" xmlns:r="http://schemas.openxmlformats.org/officeDocument/2006/relationships" xmlns:p="http://schemas.openxmlformats.org/presentationml/2006/main">
   <p:cSld>
     <p:bg>
       <p:bgPr>
@@ -6390,7 +6628,14 @@
         <p:cNvGrpSpPr/>
         <p:nvPr/>
       </p:nvGrpSpPr>
-      <p:grpSpPr/>
+      <p:grpSpPr>
+        <a:xfrm>
+          <a:off x="0" y="0"/>
+          <a:ext cx="0" cy="0"/>
+          <a:chOff x="0" y="0"/>
+          <a:chExt cx="0" cy="0"/>
+        </a:xfrm>
+      </p:grpSpPr>
       <p:sp>
         <p:nvSpPr>
           <p:cNvPr id="2" name="Rectangle 1"/>
@@ -6431,6 +6676,7 @@
           <a:lstStyle/>
           <a:p>
             <a:pPr algn="ctr"/>
+            <a:endParaRPr/>
           </a:p>
         </p:txBody>
       </p:sp>
@@ -6510,6 +6756,7 @@
           <a:lstStyle/>
           <a:p>
             <a:pPr algn="ctr"/>
+            <a:endParaRPr/>
           </a:p>
         </p:txBody>
       </p:sp>
@@ -6595,7 +6842,7 @@
 </file>
 
 <file path=ppt/slides/slide22.xml><?xml version="1.0" encoding="utf-8"?>
-<p:sld xmlns:a="http://schemas.openxmlformats.org/drawingml/2006/main" xmlns:p="http://schemas.openxmlformats.org/presentationml/2006/main" xmlns:r="http://schemas.openxmlformats.org/officeDocument/2006/relationships">
+<p:sld xmlns:a="http://schemas.openxmlformats.org/drawingml/2006/main" xmlns:r="http://schemas.openxmlformats.org/officeDocument/2006/relationships" xmlns:p="http://schemas.openxmlformats.org/presentationml/2006/main">
   <p:cSld>
     <p:bg>
       <p:bgPr>
@@ -6611,7 +6858,14 @@
         <p:cNvGrpSpPr/>
         <p:nvPr/>
       </p:nvGrpSpPr>
-      <p:grpSpPr/>
+      <p:grpSpPr>
+        <a:xfrm>
+          <a:off x="0" y="0"/>
+          <a:ext cx="0" cy="0"/>
+          <a:chOff x="0" y="0"/>
+          <a:chExt cx="0" cy="0"/>
+        </a:xfrm>
+      </p:grpSpPr>
       <p:sp>
         <p:nvSpPr>
           <p:cNvPr id="2" name="Rectangle 1"/>
@@ -6652,6 +6906,7 @@
           <a:lstStyle/>
           <a:p>
             <a:pPr algn="ctr"/>
+            <a:endParaRPr/>
           </a:p>
         </p:txBody>
       </p:sp>
@@ -6731,6 +6986,7 @@
           <a:lstStyle/>
           <a:p>
             <a:pPr algn="ctr"/>
+            <a:endParaRPr/>
           </a:p>
         </p:txBody>
       </p:sp>
@@ -6790,6 +7046,7 @@
                 <a:latin typeface="Calibri"/>
               </a:defRPr>
             </a:pPr>
+            <a:endParaRPr/>
           </a:p>
           <a:p>
             <a:pPr>
@@ -6813,6 +7070,7 @@
                 <a:latin typeface="Calibri"/>
               </a:defRPr>
             </a:pPr>
+            <a:endParaRPr/>
           </a:p>
           <a:p>
             <a:pPr>
@@ -6849,6 +7107,7 @@
                 <a:latin typeface="Calibri"/>
               </a:defRPr>
             </a:pPr>
+            <a:endParaRPr/>
           </a:p>
           <a:p>
             <a:pPr>
@@ -6885,6 +7144,7 @@
                 <a:latin typeface="Calibri"/>
               </a:defRPr>
             </a:pPr>
+            <a:endParaRPr/>
           </a:p>
           <a:p>
             <a:pPr>
@@ -6921,6 +7181,7 @@
                 <a:latin typeface="Calibri"/>
               </a:defRPr>
             </a:pPr>
+            <a:endParaRPr/>
           </a:p>
           <a:p>
             <a:pPr>
@@ -6957,6 +7218,7 @@
                 <a:latin typeface="Calibri"/>
               </a:defRPr>
             </a:pPr>
+            <a:endParaRPr/>
           </a:p>
           <a:p>
             <a:pPr>
@@ -6995,7 +7257,7 @@
 </file>
 
 <file path=ppt/slides/slide23.xml><?xml version="1.0" encoding="utf-8"?>
-<p:sld xmlns:a="http://schemas.openxmlformats.org/drawingml/2006/main" xmlns:p="http://schemas.openxmlformats.org/presentationml/2006/main" xmlns:r="http://schemas.openxmlformats.org/officeDocument/2006/relationships">
+<p:sld xmlns:a="http://schemas.openxmlformats.org/drawingml/2006/main" xmlns:r="http://schemas.openxmlformats.org/officeDocument/2006/relationships" xmlns:p="http://schemas.openxmlformats.org/presentationml/2006/main">
   <p:cSld>
     <p:bg>
       <p:bgPr>
@@ -7011,7 +7273,14 @@
         <p:cNvGrpSpPr/>
         <p:nvPr/>
       </p:nvGrpSpPr>
-      <p:grpSpPr/>
+      <p:grpSpPr>
+        <a:xfrm>
+          <a:off x="0" y="0"/>
+          <a:ext cx="0" cy="0"/>
+          <a:chOff x="0" y="0"/>
+          <a:chExt cx="0" cy="0"/>
+        </a:xfrm>
+      </p:grpSpPr>
       <p:sp>
         <p:nvSpPr>
           <p:cNvPr id="2" name="Rectangle 1"/>
@@ -7052,6 +7321,7 @@
           <a:lstStyle/>
           <a:p>
             <a:pPr algn="ctr"/>
+            <a:endParaRPr/>
           </a:p>
         </p:txBody>
       </p:sp>
@@ -7131,6 +7401,7 @@
           <a:lstStyle/>
           <a:p>
             <a:pPr algn="ctr"/>
+            <a:endParaRPr/>
           </a:p>
         </p:txBody>
       </p:sp>
@@ -7216,7 +7487,7 @@
 </file>
 
 <file path=ppt/slides/slide24.xml><?xml version="1.0" encoding="utf-8"?>
-<p:sld xmlns:a="http://schemas.openxmlformats.org/drawingml/2006/main" xmlns:p="http://schemas.openxmlformats.org/presentationml/2006/main" xmlns:r="http://schemas.openxmlformats.org/officeDocument/2006/relationships">
+<p:sld xmlns:a="http://schemas.openxmlformats.org/drawingml/2006/main" xmlns:r="http://schemas.openxmlformats.org/officeDocument/2006/relationships" xmlns:p="http://schemas.openxmlformats.org/presentationml/2006/main">
   <p:cSld>
     <p:bg>
       <p:bgPr>
@@ -7232,7 +7503,14 @@
         <p:cNvGrpSpPr/>
         <p:nvPr/>
       </p:nvGrpSpPr>
-      <p:grpSpPr/>
+      <p:grpSpPr>
+        <a:xfrm>
+          <a:off x="0" y="0"/>
+          <a:ext cx="0" cy="0"/>
+          <a:chOff x="0" y="0"/>
+          <a:chExt cx="0" cy="0"/>
+        </a:xfrm>
+      </p:grpSpPr>
       <p:sp>
         <p:nvSpPr>
           <p:cNvPr id="2" name="Rectangle 1"/>
@@ -7273,6 +7551,7 @@
           <a:lstStyle/>
           <a:p>
             <a:pPr algn="ctr"/>
+            <a:endParaRPr/>
           </a:p>
         </p:txBody>
       </p:sp>
@@ -7352,6 +7631,7 @@
           <a:lstStyle/>
           <a:p>
             <a:pPr algn="ctr"/>
+            <a:endParaRPr/>
           </a:p>
         </p:txBody>
       </p:sp>
@@ -7437,7 +7717,7 @@
 </file>
 
 <file path=ppt/slides/slide25.xml><?xml version="1.0" encoding="utf-8"?>
-<p:sld xmlns:a="http://schemas.openxmlformats.org/drawingml/2006/main" xmlns:p="http://schemas.openxmlformats.org/presentationml/2006/main" xmlns:r="http://schemas.openxmlformats.org/officeDocument/2006/relationships">
+<p:sld xmlns:a="http://schemas.openxmlformats.org/drawingml/2006/main" xmlns:r="http://schemas.openxmlformats.org/officeDocument/2006/relationships" xmlns:p="http://schemas.openxmlformats.org/presentationml/2006/main">
   <p:cSld>
     <p:bg>
       <p:bgPr>
@@ -7453,7 +7733,14 @@
         <p:cNvGrpSpPr/>
         <p:nvPr/>
       </p:nvGrpSpPr>
-      <p:grpSpPr/>
+      <p:grpSpPr>
+        <a:xfrm>
+          <a:off x="0" y="0"/>
+          <a:ext cx="0" cy="0"/>
+          <a:chOff x="0" y="0"/>
+          <a:chExt cx="0" cy="0"/>
+        </a:xfrm>
+      </p:grpSpPr>
       <p:sp>
         <p:nvSpPr>
           <p:cNvPr id="2" name="Rectangle 1"/>
@@ -7494,6 +7781,7 @@
           <a:lstStyle/>
           <a:p>
             <a:pPr algn="ctr"/>
+            <a:endParaRPr/>
           </a:p>
         </p:txBody>
       </p:sp>
@@ -7573,6 +7861,7 @@
           <a:lstStyle/>
           <a:p>
             <a:pPr algn="ctr"/>
+            <a:endParaRPr/>
           </a:p>
         </p:txBody>
       </p:sp>
@@ -7609,7 +7898,7 @@
 </file>
 
 <file path=ppt/slides/slide26.xml><?xml version="1.0" encoding="utf-8"?>
-<p:sld xmlns:a="http://schemas.openxmlformats.org/drawingml/2006/main" xmlns:p="http://schemas.openxmlformats.org/presentationml/2006/main" xmlns:r="http://schemas.openxmlformats.org/officeDocument/2006/relationships">
+<p:sld xmlns:a="http://schemas.openxmlformats.org/drawingml/2006/main" xmlns:r="http://schemas.openxmlformats.org/officeDocument/2006/relationships" xmlns:p="http://schemas.openxmlformats.org/presentationml/2006/main">
   <p:cSld>
     <p:bg>
       <p:bgPr>
@@ -7625,7 +7914,14 @@
         <p:cNvGrpSpPr/>
         <p:nvPr/>
       </p:nvGrpSpPr>
-      <p:grpSpPr/>
+      <p:grpSpPr>
+        <a:xfrm>
+          <a:off x="0" y="0"/>
+          <a:ext cx="0" cy="0"/>
+          <a:chOff x="0" y="0"/>
+          <a:chExt cx="0" cy="0"/>
+        </a:xfrm>
+      </p:grpSpPr>
       <p:sp>
         <p:nvSpPr>
           <p:cNvPr id="2" name="Rectangle 1"/>
@@ -7666,6 +7962,7 @@
           <a:lstStyle/>
           <a:p>
             <a:pPr algn="ctr"/>
+            <a:endParaRPr/>
           </a:p>
         </p:txBody>
       </p:sp>
@@ -7745,6 +8042,7 @@
           <a:lstStyle/>
           <a:p>
             <a:pPr algn="ctr"/>
+            <a:endParaRPr/>
           </a:p>
         </p:txBody>
       </p:sp>
@@ -7767,11 +8065,41 @@
                 <a:tableStyleId>{5C22544A-7EE6-4342-B048-85BDC9FD1C3A}</a:tableStyleId>
               </a:tblPr>
               <a:tblGrid>
-                <a:gridCol w="2249424"/>
-                <a:gridCol w="2249424"/>
-                <a:gridCol w="2249424"/>
-                <a:gridCol w="2249424"/>
-                <a:gridCol w="2249424"/>
+                <a:gridCol w="2249424">
+                  <a:extLst>
+                    <a:ext uri="{9D8B030D-6E8A-4147-A177-3AD203B41FA5}">
+                      <a16:colId xmlns:a16="http://schemas.microsoft.com/office/drawing/2014/main" val="20000"/>
+                    </a:ext>
+                  </a:extLst>
+                </a:gridCol>
+                <a:gridCol w="2249424">
+                  <a:extLst>
+                    <a:ext uri="{9D8B030D-6E8A-4147-A177-3AD203B41FA5}">
+                      <a16:colId xmlns:a16="http://schemas.microsoft.com/office/drawing/2014/main" val="20001"/>
+                    </a:ext>
+                  </a:extLst>
+                </a:gridCol>
+                <a:gridCol w="2249424">
+                  <a:extLst>
+                    <a:ext uri="{9D8B030D-6E8A-4147-A177-3AD203B41FA5}">
+                      <a16:colId xmlns:a16="http://schemas.microsoft.com/office/drawing/2014/main" val="20002"/>
+                    </a:ext>
+                  </a:extLst>
+                </a:gridCol>
+                <a:gridCol w="2249424">
+                  <a:extLst>
+                    <a:ext uri="{9D8B030D-6E8A-4147-A177-3AD203B41FA5}">
+                      <a16:colId xmlns:a16="http://schemas.microsoft.com/office/drawing/2014/main" val="20003"/>
+                    </a:ext>
+                  </a:extLst>
+                </a:gridCol>
+                <a:gridCol w="2249424">
+                  <a:extLst>
+                    <a:ext uri="{9D8B030D-6E8A-4147-A177-3AD203B41FA5}">
+                      <a16:colId xmlns:a16="http://schemas.microsoft.com/office/drawing/2014/main" val="20004"/>
+                    </a:ext>
+                  </a:extLst>
+                </a:gridCol>
               </a:tblGrid>
               <a:tr h="508000">
                 <a:tc>
@@ -7894,6 +8222,11 @@
                     </a:solidFill>
                   </a:tcPr>
                 </a:tc>
+                <a:extLst>
+                  <a:ext uri="{0D108BD9-81ED-4DB2-BD59-A6C34878D82A}">
+                    <a16:rowId xmlns:a16="http://schemas.microsoft.com/office/drawing/2014/main" val="10000"/>
+                  </a:ext>
+                </a:extLst>
               </a:tr>
               <a:tr h="508000">
                 <a:tc>
@@ -7996,6 +8329,11 @@
                   </a:txBody>
                   <a:tcPr/>
                 </a:tc>
+                <a:extLst>
+                  <a:ext uri="{0D108BD9-81ED-4DB2-BD59-A6C34878D82A}">
+                    <a16:rowId xmlns:a16="http://schemas.microsoft.com/office/drawing/2014/main" val="10001"/>
+                  </a:ext>
+                </a:extLst>
               </a:tr>
               <a:tr h="508000">
                 <a:tc>
@@ -8118,6 +8456,11 @@
                     </a:solidFill>
                   </a:tcPr>
                 </a:tc>
+                <a:extLst>
+                  <a:ext uri="{0D108BD9-81ED-4DB2-BD59-A6C34878D82A}">
+                    <a16:rowId xmlns:a16="http://schemas.microsoft.com/office/drawing/2014/main" val="10002"/>
+                  </a:ext>
+                </a:extLst>
               </a:tr>
               <a:tr h="508000">
                 <a:tc>
@@ -8220,6 +8563,11 @@
                   </a:txBody>
                   <a:tcPr/>
                 </a:tc>
+                <a:extLst>
+                  <a:ext uri="{0D108BD9-81ED-4DB2-BD59-A6C34878D82A}">
+                    <a16:rowId xmlns:a16="http://schemas.microsoft.com/office/drawing/2014/main" val="10003"/>
+                  </a:ext>
+                </a:extLst>
               </a:tr>
               <a:tr h="508000">
                 <a:tc>
@@ -8342,6 +8690,11 @@
                     </a:solidFill>
                   </a:tcPr>
                 </a:tc>
+                <a:extLst>
+                  <a:ext uri="{0D108BD9-81ED-4DB2-BD59-A6C34878D82A}">
+                    <a16:rowId xmlns:a16="http://schemas.microsoft.com/office/drawing/2014/main" val="10004"/>
+                  </a:ext>
+                </a:extLst>
               </a:tr>
               <a:tr h="508000">
                 <a:tc>
@@ -8444,6 +8797,11 @@
                   </a:txBody>
                   <a:tcPr/>
                 </a:tc>
+                <a:extLst>
+                  <a:ext uri="{0D108BD9-81ED-4DB2-BD59-A6C34878D82A}">
+                    <a16:rowId xmlns:a16="http://schemas.microsoft.com/office/drawing/2014/main" val="10005"/>
+                  </a:ext>
+                </a:extLst>
               </a:tr>
               <a:tr h="508000">
                 <a:tc>
@@ -8566,6 +8924,11 @@
                     </a:solidFill>
                   </a:tcPr>
                 </a:tc>
+                <a:extLst>
+                  <a:ext uri="{0D108BD9-81ED-4DB2-BD59-A6C34878D82A}">
+                    <a16:rowId xmlns:a16="http://schemas.microsoft.com/office/drawing/2014/main" val="10006"/>
+                  </a:ext>
+                </a:extLst>
               </a:tr>
               <a:tr h="508000">
                 <a:tc>
@@ -8668,6 +9031,11 @@
                   </a:txBody>
                   <a:tcPr/>
                 </a:tc>
+                <a:extLst>
+                  <a:ext uri="{0D108BD9-81ED-4DB2-BD59-A6C34878D82A}">
+                    <a16:rowId xmlns:a16="http://schemas.microsoft.com/office/drawing/2014/main" val="10007"/>
+                  </a:ext>
+                </a:extLst>
               </a:tr>
               <a:tr h="508000">
                 <a:tc>
@@ -8790,6 +9158,11 @@
                     </a:solidFill>
                   </a:tcPr>
                 </a:tc>
+                <a:extLst>
+                  <a:ext uri="{0D108BD9-81ED-4DB2-BD59-A6C34878D82A}">
+                    <a16:rowId xmlns:a16="http://schemas.microsoft.com/office/drawing/2014/main" val="10008"/>
+                  </a:ext>
+                </a:extLst>
               </a:tr>
             </a:tbl>
           </a:graphicData>
@@ -8804,7 +9177,7 @@
 </file>
 
 <file path=ppt/slides/slide27.xml><?xml version="1.0" encoding="utf-8"?>
-<p:sld xmlns:a="http://schemas.openxmlformats.org/drawingml/2006/main" xmlns:p="http://schemas.openxmlformats.org/presentationml/2006/main" xmlns:r="http://schemas.openxmlformats.org/officeDocument/2006/relationships">
+<p:sld xmlns:a="http://schemas.openxmlformats.org/drawingml/2006/main" xmlns:r="http://schemas.openxmlformats.org/officeDocument/2006/relationships" xmlns:p="http://schemas.openxmlformats.org/presentationml/2006/main">
   <p:cSld>
     <p:bg>
       <p:bgPr>
@@ -8820,7 +9193,14 @@
         <p:cNvGrpSpPr/>
         <p:nvPr/>
       </p:nvGrpSpPr>
-      <p:grpSpPr/>
+      <p:grpSpPr>
+        <a:xfrm>
+          <a:off x="0" y="0"/>
+          <a:ext cx="0" cy="0"/>
+          <a:chOff x="0" y="0"/>
+          <a:chExt cx="0" cy="0"/>
+        </a:xfrm>
+      </p:grpSpPr>
       <p:sp>
         <p:nvSpPr>
           <p:cNvPr id="2" name="Rectangle 1"/>
@@ -8861,6 +9241,7 @@
           <a:lstStyle/>
           <a:p>
             <a:pPr algn="ctr"/>
+            <a:endParaRPr/>
           </a:p>
         </p:txBody>
       </p:sp>
@@ -8940,6 +9321,7 @@
           <a:lstStyle/>
           <a:p>
             <a:pPr algn="ctr"/>
+            <a:endParaRPr/>
           </a:p>
         </p:txBody>
       </p:sp>
@@ -8986,6 +9368,7 @@
                 <a:latin typeface="Calibri"/>
               </a:defRPr>
             </a:pPr>
+            <a:endParaRPr/>
           </a:p>
           <a:p>
             <a:pPr>
@@ -9009,6 +9392,7 @@
                 <a:latin typeface="Calibri"/>
               </a:defRPr>
             </a:pPr>
+            <a:endParaRPr/>
           </a:p>
           <a:p>
             <a:pPr>
@@ -9032,6 +9416,7 @@
                 <a:latin typeface="Calibri"/>
               </a:defRPr>
             </a:pPr>
+            <a:endParaRPr/>
           </a:p>
           <a:p>
             <a:pPr>
@@ -9094,6 +9479,7 @@
                 <a:latin typeface="Calibri"/>
               </a:defRPr>
             </a:pPr>
+            <a:endParaRPr/>
           </a:p>
           <a:p>
             <a:pPr>
@@ -9117,6 +9503,7 @@
                 <a:latin typeface="Calibri"/>
               </a:defRPr>
             </a:pPr>
+            <a:endParaRPr/>
           </a:p>
           <a:p>
             <a:pPr>
@@ -9140,6 +9527,7 @@
                 <a:latin typeface="Calibri"/>
               </a:defRPr>
             </a:pPr>
+            <a:endParaRPr/>
           </a:p>
           <a:p>
             <a:pPr>
@@ -9176,6 +9564,7 @@
                 <a:latin typeface="Calibri"/>
               </a:defRPr>
             </a:pPr>
+            <a:endParaRPr/>
           </a:p>
           <a:p>
             <a:pPr>
@@ -9214,7 +9603,7 @@
 </file>
 
 <file path=ppt/slides/slide28.xml><?xml version="1.0" encoding="utf-8"?>
-<p:sld xmlns:a="http://schemas.openxmlformats.org/drawingml/2006/main" xmlns:p="http://schemas.openxmlformats.org/presentationml/2006/main" xmlns:r="http://schemas.openxmlformats.org/officeDocument/2006/relationships">
+<p:sld xmlns:a="http://schemas.openxmlformats.org/drawingml/2006/main" xmlns:r="http://schemas.openxmlformats.org/officeDocument/2006/relationships" xmlns:p="http://schemas.openxmlformats.org/presentationml/2006/main">
   <p:cSld>
     <p:bg>
       <p:bgPr>
@@ -9230,7 +9619,14 @@
         <p:cNvGrpSpPr/>
         <p:nvPr/>
       </p:nvGrpSpPr>
-      <p:grpSpPr/>
+      <p:grpSpPr>
+        <a:xfrm>
+          <a:off x="0" y="0"/>
+          <a:ext cx="0" cy="0"/>
+          <a:chOff x="0" y="0"/>
+          <a:chExt cx="0" cy="0"/>
+        </a:xfrm>
+      </p:grpSpPr>
       <p:sp>
         <p:nvSpPr>
           <p:cNvPr id="2" name="Rectangle 1"/>
@@ -9271,6 +9667,7 @@
           <a:lstStyle/>
           <a:p>
             <a:pPr algn="ctr"/>
+            <a:endParaRPr/>
           </a:p>
         </p:txBody>
       </p:sp>
@@ -9350,6 +9747,7 @@
           <a:lstStyle/>
           <a:p>
             <a:pPr algn="ctr"/>
+            <a:endParaRPr/>
           </a:p>
         </p:txBody>
       </p:sp>
@@ -9448,6 +9846,7 @@
                 <a:latin typeface="Calibri"/>
               </a:defRPr>
             </a:pPr>
+            <a:endParaRPr/>
           </a:p>
           <a:p>
             <a:pPr>
@@ -9523,6 +9922,7 @@
                 <a:latin typeface="Calibri"/>
               </a:defRPr>
             </a:pPr>
+            <a:endParaRPr/>
           </a:p>
           <a:p>
             <a:pPr>
@@ -9613,7 +10013,7 @@
 </file>
 
 <file path=ppt/slides/slide29.xml><?xml version="1.0" encoding="utf-8"?>
-<p:sld xmlns:a="http://schemas.openxmlformats.org/drawingml/2006/main" xmlns:p="http://schemas.openxmlformats.org/presentationml/2006/main" xmlns:r="http://schemas.openxmlformats.org/officeDocument/2006/relationships">
+<p:sld xmlns:a="http://schemas.openxmlformats.org/drawingml/2006/main" xmlns:r="http://schemas.openxmlformats.org/officeDocument/2006/relationships" xmlns:p="http://schemas.openxmlformats.org/presentationml/2006/main">
   <p:cSld>
     <p:bg>
       <p:bgPr>
@@ -9629,7 +10029,14 @@
         <p:cNvGrpSpPr/>
         <p:nvPr/>
       </p:nvGrpSpPr>
-      <p:grpSpPr/>
+      <p:grpSpPr>
+        <a:xfrm>
+          <a:off x="0" y="0"/>
+          <a:ext cx="0" cy="0"/>
+          <a:chOff x="0" y="0"/>
+          <a:chExt cx="0" cy="0"/>
+        </a:xfrm>
+      </p:grpSpPr>
       <p:sp>
         <p:nvSpPr>
           <p:cNvPr id="2" name="Rectangle 1"/>
@@ -9670,6 +10077,7 @@
           <a:lstStyle/>
           <a:p>
             <a:pPr algn="ctr"/>
+            <a:endParaRPr/>
           </a:p>
         </p:txBody>
       </p:sp>
@@ -9713,6 +10121,7 @@
           <a:lstStyle/>
           <a:p>
             <a:pPr algn="ctr"/>
+            <a:endParaRPr/>
           </a:p>
         </p:txBody>
       </p:sp>
@@ -9792,6 +10201,7 @@
           <a:lstStyle/>
           <a:p>
             <a:pPr algn="ctr"/>
+            <a:endParaRPr/>
           </a:p>
         </p:txBody>
       </p:sp>
@@ -9952,7 +10362,7 @@
 </file>
 
 <file path=ppt/slides/slide3.xml><?xml version="1.0" encoding="utf-8"?>
-<p:sld xmlns:a="http://schemas.openxmlformats.org/drawingml/2006/main" xmlns:p="http://schemas.openxmlformats.org/presentationml/2006/main" xmlns:r="http://schemas.openxmlformats.org/officeDocument/2006/relationships">
+<p:sld xmlns:a="http://schemas.openxmlformats.org/drawingml/2006/main" xmlns:r="http://schemas.openxmlformats.org/officeDocument/2006/relationships" xmlns:p="http://schemas.openxmlformats.org/presentationml/2006/main">
   <p:cSld>
     <p:bg>
       <p:bgPr>
@@ -9968,7 +10378,14 @@
         <p:cNvGrpSpPr/>
         <p:nvPr/>
       </p:nvGrpSpPr>
-      <p:grpSpPr/>
+      <p:grpSpPr>
+        <a:xfrm>
+          <a:off x="0" y="0"/>
+          <a:ext cx="0" cy="0"/>
+          <a:chOff x="0" y="0"/>
+          <a:chExt cx="0" cy="0"/>
+        </a:xfrm>
+      </p:grpSpPr>
       <p:sp>
         <p:nvSpPr>
           <p:cNvPr id="2" name="Rectangle 1"/>
@@ -10009,6 +10426,7 @@
           <a:lstStyle/>
           <a:p>
             <a:pPr algn="ctr"/>
+            <a:endParaRPr/>
           </a:p>
         </p:txBody>
       </p:sp>
@@ -10088,6 +10506,7 @@
           <a:lstStyle/>
           <a:p>
             <a:pPr algn="ctr"/>
+            <a:endParaRPr/>
           </a:p>
         </p:txBody>
       </p:sp>
@@ -10199,6 +10618,7 @@
                 <a:latin typeface="Calibri"/>
               </a:defRPr>
             </a:pPr>
+            <a:endParaRPr/>
           </a:p>
           <a:p>
             <a:pPr>
@@ -10235,6 +10655,7 @@
                 <a:latin typeface="Calibri"/>
               </a:defRPr>
             </a:pPr>
+            <a:endParaRPr/>
           </a:p>
           <a:p>
             <a:pPr>
@@ -10260,7 +10681,7 @@
 </file>
 
 <file path=ppt/slides/slide4.xml><?xml version="1.0" encoding="utf-8"?>
-<p:sld xmlns:a="http://schemas.openxmlformats.org/drawingml/2006/main" xmlns:p="http://schemas.openxmlformats.org/presentationml/2006/main" xmlns:r="http://schemas.openxmlformats.org/officeDocument/2006/relationships">
+<p:sld xmlns:a="http://schemas.openxmlformats.org/drawingml/2006/main" xmlns:r="http://schemas.openxmlformats.org/officeDocument/2006/relationships" xmlns:p="http://schemas.openxmlformats.org/presentationml/2006/main">
   <p:cSld>
     <p:bg>
       <p:bgPr>
@@ -10276,7 +10697,14 @@
         <p:cNvGrpSpPr/>
         <p:nvPr/>
       </p:nvGrpSpPr>
-      <p:grpSpPr/>
+      <p:grpSpPr>
+        <a:xfrm>
+          <a:off x="0" y="0"/>
+          <a:ext cx="0" cy="0"/>
+          <a:chOff x="0" y="0"/>
+          <a:chExt cx="0" cy="0"/>
+        </a:xfrm>
+      </p:grpSpPr>
       <p:sp>
         <p:nvSpPr>
           <p:cNvPr id="2" name="Rectangle 1"/>
@@ -10317,6 +10745,7 @@
           <a:lstStyle/>
           <a:p>
             <a:pPr algn="ctr"/>
+            <a:endParaRPr/>
           </a:p>
         </p:txBody>
       </p:sp>
@@ -10396,6 +10825,7 @@
           <a:lstStyle/>
           <a:p>
             <a:pPr algn="ctr"/>
+            <a:endParaRPr/>
           </a:p>
         </p:txBody>
       </p:sp>
@@ -10415,8 +10845,8 @@
         </p:blipFill>
         <p:spPr>
           <a:xfrm>
-            <a:off x="457200" y="1097280"/>
-            <a:ext cx="11247120" cy="6958445"/>
+            <a:off x="1480457" y="1024128"/>
+            <a:ext cx="8830490" cy="5463308"/>
           </a:xfrm>
           <a:prstGeom prst="rect">
             <a:avLst/>
@@ -10481,7 +10911,7 @@
 </file>
 
 <file path=ppt/slides/slide5.xml><?xml version="1.0" encoding="utf-8"?>
-<p:sld xmlns:a="http://schemas.openxmlformats.org/drawingml/2006/main" xmlns:p="http://schemas.openxmlformats.org/presentationml/2006/main" xmlns:r="http://schemas.openxmlformats.org/officeDocument/2006/relationships">
+<p:sld xmlns:a="http://schemas.openxmlformats.org/drawingml/2006/main" xmlns:r="http://schemas.openxmlformats.org/officeDocument/2006/relationships" xmlns:p="http://schemas.openxmlformats.org/presentationml/2006/main">
   <p:cSld>
     <p:bg>
       <p:bgPr>
@@ -10497,7 +10927,14 @@
         <p:cNvGrpSpPr/>
         <p:nvPr/>
       </p:nvGrpSpPr>
-      <p:grpSpPr/>
+      <p:grpSpPr>
+        <a:xfrm>
+          <a:off x="0" y="0"/>
+          <a:ext cx="0" cy="0"/>
+          <a:chOff x="0" y="0"/>
+          <a:chExt cx="0" cy="0"/>
+        </a:xfrm>
+      </p:grpSpPr>
       <p:sp>
         <p:nvSpPr>
           <p:cNvPr id="2" name="Rectangle 1"/>
@@ -10538,6 +10975,7 @@
           <a:lstStyle/>
           <a:p>
             <a:pPr algn="ctr"/>
+            <a:endParaRPr/>
           </a:p>
         </p:txBody>
       </p:sp>
@@ -10617,6 +11055,7 @@
           <a:lstStyle/>
           <a:p>
             <a:pPr algn="ctr"/>
+            <a:endParaRPr/>
           </a:p>
         </p:txBody>
       </p:sp>
@@ -10800,7 +11239,7 @@
 </file>
 
 <file path=ppt/slides/slide6.xml><?xml version="1.0" encoding="utf-8"?>
-<p:sld xmlns:a="http://schemas.openxmlformats.org/drawingml/2006/main" xmlns:p="http://schemas.openxmlformats.org/presentationml/2006/main" xmlns:r="http://schemas.openxmlformats.org/officeDocument/2006/relationships">
+<p:sld xmlns:a="http://schemas.openxmlformats.org/drawingml/2006/main" xmlns:r="http://schemas.openxmlformats.org/officeDocument/2006/relationships" xmlns:p="http://schemas.openxmlformats.org/presentationml/2006/main">
   <p:cSld>
     <p:bg>
       <p:bgPr>
@@ -10816,7 +11255,14 @@
         <p:cNvGrpSpPr/>
         <p:nvPr/>
       </p:nvGrpSpPr>
-      <p:grpSpPr/>
+      <p:grpSpPr>
+        <a:xfrm>
+          <a:off x="0" y="0"/>
+          <a:ext cx="0" cy="0"/>
+          <a:chOff x="0" y="0"/>
+          <a:chExt cx="0" cy="0"/>
+        </a:xfrm>
+      </p:grpSpPr>
       <p:sp>
         <p:nvSpPr>
           <p:cNvPr id="2" name="Rectangle 1"/>
@@ -10857,6 +11303,7 @@
           <a:lstStyle/>
           <a:p>
             <a:pPr algn="ctr"/>
+            <a:endParaRPr/>
           </a:p>
         </p:txBody>
       </p:sp>
@@ -10936,6 +11383,7 @@
           <a:lstStyle/>
           <a:p>
             <a:pPr algn="ctr"/>
+            <a:endParaRPr/>
           </a:p>
         </p:txBody>
       </p:sp>
@@ -11095,7 +11543,7 @@
 </file>
 
 <file path=ppt/slides/slide7.xml><?xml version="1.0" encoding="utf-8"?>
-<p:sld xmlns:a="http://schemas.openxmlformats.org/drawingml/2006/main" xmlns:p="http://schemas.openxmlformats.org/presentationml/2006/main" xmlns:r="http://schemas.openxmlformats.org/officeDocument/2006/relationships">
+<p:sld xmlns:a="http://schemas.openxmlformats.org/drawingml/2006/main" xmlns:r="http://schemas.openxmlformats.org/officeDocument/2006/relationships" xmlns:p="http://schemas.openxmlformats.org/presentationml/2006/main">
   <p:cSld>
     <p:bg>
       <p:bgPr>
@@ -11111,7 +11559,14 @@
         <p:cNvGrpSpPr/>
         <p:nvPr/>
       </p:nvGrpSpPr>
-      <p:grpSpPr/>
+      <p:grpSpPr>
+        <a:xfrm>
+          <a:off x="0" y="0"/>
+          <a:ext cx="0" cy="0"/>
+          <a:chOff x="0" y="0"/>
+          <a:chExt cx="0" cy="0"/>
+        </a:xfrm>
+      </p:grpSpPr>
       <p:sp>
         <p:nvSpPr>
           <p:cNvPr id="2" name="Rectangle 1"/>
@@ -11152,6 +11607,7 @@
           <a:lstStyle/>
           <a:p>
             <a:pPr algn="ctr"/>
+            <a:endParaRPr/>
           </a:p>
         </p:txBody>
       </p:sp>
@@ -11231,6 +11687,7 @@
           <a:lstStyle/>
           <a:p>
             <a:pPr algn="ctr"/>
+            <a:endParaRPr/>
           </a:p>
         </p:txBody>
       </p:sp>
@@ -11338,8 +11795,8 @@
         </p:nvSpPr>
         <p:spPr>
           <a:xfrm>
-            <a:off x="6492240" y="1371600"/>
-            <a:ext cx="4937760" cy="4297680"/>
+            <a:off x="6862354" y="1371600"/>
+            <a:ext cx="4567646" cy="2031325"/>
           </a:xfrm>
           <a:prstGeom prst="rect">
             <a:avLst/>
@@ -11361,7 +11818,24 @@
               </a:defRPr>
             </a:pPr>
             <a:r>
-              <a:t>Jump term S(t−)(e^J − 1)dN(t) superimposes compound Poisson jumps on GBM.</a:t>
+              <a:rPr dirty="0"/>
+              <a:t>Jump term S(t−)(</a:t>
+            </a:r>
+            <a:r>
+              <a:rPr dirty="0" err="1"/>
+              <a:t>e^J</a:t>
+            </a:r>
+            <a:r>
+              <a:rPr dirty="0"/>
+              <a:t> − 1)</a:t>
+            </a:r>
+            <a:r>
+              <a:rPr dirty="0" err="1"/>
+              <a:t>dN</a:t>
+            </a:r>
+            <a:r>
+              <a:rPr dirty="0"/>
+              <a:t>(t) superimposes compound Poisson jumps on GBM.</a:t>
             </a:r>
           </a:p>
           <a:p>
@@ -11374,7 +11848,24 @@
               </a:defRPr>
             </a:pPr>
             <a:r>
-              <a:t>Applying Itô for jump–diffusions gives d(ln S) with an extra J dN(t) term.</a:t>
+              <a:rPr dirty="0"/>
+              <a:t>Applying </a:t>
+            </a:r>
+            <a:r>
+              <a:rPr dirty="0" err="1"/>
+              <a:t>Itô</a:t>
+            </a:r>
+            <a:r>
+              <a:rPr dirty="0"/>
+              <a:t> for jump–diffusions gives d(ln S) with an extra J </a:t>
+            </a:r>
+            <a:r>
+              <a:rPr dirty="0" err="1"/>
+              <a:t>dN</a:t>
+            </a:r>
+            <a:r>
+              <a:rPr dirty="0"/>
+              <a:t>(t) term.</a:t>
             </a:r>
           </a:p>
           <a:p>
@@ -11387,6 +11878,7 @@
               </a:defRPr>
             </a:pPr>
             <a:r>
+              <a:rPr dirty="0"/>
               <a:t>Conditioning on N=k jumps → Gaussian with shifted mean/variance;</a:t>
             </a:r>
           </a:p>
@@ -11400,7 +11892,12 @@
               </a:defRPr>
             </a:pPr>
             <a:r>
-              <a:t>marginalising over k gives a Poisson‑weighted Gaussian mixture.</a:t>
+              <a:rPr dirty="0" err="1"/>
+              <a:t>marginalising</a:t>
+            </a:r>
+            <a:r>
+              <a:rPr dirty="0"/>
+              <a:t> over k gives a Poisson‑weighted Gaussian mixture.</a:t>
             </a:r>
           </a:p>
           <a:p>
@@ -11413,7 +11910,24 @@
               </a:defRPr>
             </a:pPr>
             <a:r>
-              <a:t>[Me76] Merton (1976), [CT04] Cont &amp; Tankov (2004).</a:t>
+              <a:rPr dirty="0"/>
+              <a:t>[Me76] Merton (1976), [CT04] </a:t>
+            </a:r>
+            <a:r>
+              <a:rPr dirty="0" err="1"/>
+              <a:t>Cont</a:t>
+            </a:r>
+            <a:r>
+              <a:rPr dirty="0"/>
+              <a:t> &amp; </a:t>
+            </a:r>
+            <a:r>
+              <a:rPr dirty="0" err="1"/>
+              <a:t>Tankov</a:t>
+            </a:r>
+            <a:r>
+              <a:rPr dirty="0"/>
+              <a:t> (2004).</a:t>
             </a:r>
           </a:p>
         </p:txBody>
@@ -11427,7 +11941,7 @@
 </file>
 
 <file path=ppt/slides/slide8.xml><?xml version="1.0" encoding="utf-8"?>
-<p:sld xmlns:a="http://schemas.openxmlformats.org/drawingml/2006/main" xmlns:p="http://schemas.openxmlformats.org/presentationml/2006/main" xmlns:r="http://schemas.openxmlformats.org/officeDocument/2006/relationships">
+<p:sld xmlns:a="http://schemas.openxmlformats.org/drawingml/2006/main" xmlns:r="http://schemas.openxmlformats.org/officeDocument/2006/relationships" xmlns:p="http://schemas.openxmlformats.org/presentationml/2006/main">
   <p:cSld>
     <p:bg>
       <p:bgPr>
@@ -11443,7 +11957,14 @@
         <p:cNvGrpSpPr/>
         <p:nvPr/>
       </p:nvGrpSpPr>
-      <p:grpSpPr/>
+      <p:grpSpPr>
+        <a:xfrm>
+          <a:off x="0" y="0"/>
+          <a:ext cx="0" cy="0"/>
+          <a:chOff x="0" y="0"/>
+          <a:chExt cx="0" cy="0"/>
+        </a:xfrm>
+      </p:grpSpPr>
       <p:sp>
         <p:nvSpPr>
           <p:cNvPr id="2" name="Rectangle 1"/>
@@ -11484,6 +12005,7 @@
           <a:lstStyle/>
           <a:p>
             <a:pPr algn="ctr"/>
+            <a:endParaRPr/>
           </a:p>
         </p:txBody>
       </p:sp>
@@ -11563,6 +12085,7 @@
           <a:lstStyle/>
           <a:p>
             <a:pPr algn="ctr"/>
+            <a:endParaRPr/>
           </a:p>
         </p:txBody>
       </p:sp>
@@ -11670,8 +12193,8 @@
         </p:nvSpPr>
         <p:spPr>
           <a:xfrm>
-            <a:off x="6492240" y="1371600"/>
-            <a:ext cx="4937760" cy="4297680"/>
+            <a:off x="6879770" y="1371600"/>
+            <a:ext cx="4550229" cy="1815882"/>
           </a:xfrm>
           <a:prstGeom prst="rect">
             <a:avLst/>
@@ -11693,6 +12216,7 @@
               </a:defRPr>
             </a:pPr>
             <a:r>
+              <a:rPr dirty="0"/>
               <a:t>Log‑likelihood is a sum of log Gaussian‑mixture densities evaluated at NIFTY log‑returns.</a:t>
             </a:r>
           </a:p>
@@ -11706,7 +12230,32 @@
               </a:defRPr>
             </a:pPr>
             <a:r>
-              <a:t>We maximise ℓ(θ) numerically (L‑BFGS‑B) over θ = (μ, σ, λ, μ_J, σ_J).</a:t>
+              <a:rPr dirty="0"/>
+              <a:t>We </a:t>
+            </a:r>
+            <a:r>
+              <a:rPr dirty="0" err="1"/>
+              <a:t>maximise</a:t>
+            </a:r>
+            <a:r>
+              <a:rPr dirty="0"/>
+              <a:t> ℓ(θ) numerically (L‑BFGS‑B) over θ = (μ, σ, λ, </a:t>
+            </a:r>
+            <a:r>
+              <a:rPr dirty="0" err="1"/>
+              <a:t>μ_J</a:t>
+            </a:r>
+            <a:r>
+              <a:rPr dirty="0"/>
+              <a:t>, </a:t>
+            </a:r>
+            <a:r>
+              <a:rPr dirty="0" err="1"/>
+              <a:t>σ_J</a:t>
+            </a:r>
+            <a:r>
+              <a:rPr dirty="0"/>
+              <a:t>).</a:t>
             </a:r>
           </a:p>
           <a:p>
@@ -11719,6 +12268,7 @@
               </a:defRPr>
             </a:pPr>
             <a:r>
+              <a:rPr dirty="0"/>
               <a:t>Variance decomposition highlights the role of λ(μ_J²+σ_J²) term in generating fat tails.</a:t>
             </a:r>
           </a:p>
@@ -11732,6 +12282,7 @@
               </a:defRPr>
             </a:pPr>
             <a:r>
+              <a:rPr dirty="0"/>
               <a:t>Closed‑form excess kurtosis shows MJD can match empirical kurtosis where BS cannot.</a:t>
             </a:r>
           </a:p>
@@ -11746,7 +12297,7 @@
 </file>
 
 <file path=ppt/slides/slide9.xml><?xml version="1.0" encoding="utf-8"?>
-<p:sld xmlns:a="http://schemas.openxmlformats.org/drawingml/2006/main" xmlns:p="http://schemas.openxmlformats.org/presentationml/2006/main" xmlns:r="http://schemas.openxmlformats.org/officeDocument/2006/relationships">
+<p:sld xmlns:a="http://schemas.openxmlformats.org/drawingml/2006/main" xmlns:r="http://schemas.openxmlformats.org/officeDocument/2006/relationships" xmlns:p="http://schemas.openxmlformats.org/presentationml/2006/main">
   <p:cSld>
     <p:bg>
       <p:bgPr>
@@ -11762,7 +12313,14 @@
         <p:cNvGrpSpPr/>
         <p:nvPr/>
       </p:nvGrpSpPr>
-      <p:grpSpPr/>
+      <p:grpSpPr>
+        <a:xfrm>
+          <a:off x="0" y="0"/>
+          <a:ext cx="0" cy="0"/>
+          <a:chOff x="0" y="0"/>
+          <a:chExt cx="0" cy="0"/>
+        </a:xfrm>
+      </p:grpSpPr>
       <p:sp>
         <p:nvSpPr>
           <p:cNvPr id="2" name="Rectangle 1"/>
@@ -11803,6 +12361,7 @@
           <a:lstStyle/>
           <a:p>
             <a:pPr algn="ctr"/>
+            <a:endParaRPr/>
           </a:p>
         </p:txBody>
       </p:sp>
@@ -11882,6 +12441,7 @@
           <a:lstStyle/>
           <a:p>
             <a:pPr algn="ctr"/>
+            <a:endParaRPr/>
           </a:p>
         </p:txBody>
       </p:sp>
@@ -11901,8 +12461,8 @@
         </p:blipFill>
         <p:spPr>
           <a:xfrm>
-            <a:off x="274320" y="1097280"/>
-            <a:ext cx="11430000" cy="8763802"/>
+            <a:off x="2338252" y="914400"/>
+            <a:ext cx="7650479" cy="5865905"/>
           </a:xfrm>
           <a:prstGeom prst="rect">
             <a:avLst/>
@@ -11917,8 +12477,8 @@
         </p:nvSpPr>
         <p:spPr>
           <a:xfrm>
-            <a:off x="731520" y="5486400"/>
-            <a:ext cx="10515600" cy="1097280"/>
+            <a:off x="566057" y="5715446"/>
+            <a:ext cx="10733314" cy="738664"/>
           </a:xfrm>
           <a:prstGeom prst="rect">
             <a:avLst/>
@@ -11940,6 +12500,7 @@
               </a:defRPr>
             </a:pPr>
             <a:r>
+              <a:rPr dirty="0"/>
               <a:t>Top row: GBM paths are smooth; MJD paths show red vertical lines and dots at jump times.</a:t>
             </a:r>
           </a:p>
@@ -11953,7 +12514,16 @@
               </a:defRPr>
             </a:pPr>
             <a:r>
-              <a:t>Bottom‑left: single‑path decomposition — diffusion only vs diffusion+jumps; arrows show discrete jumps.</a:t>
+              <a:rPr dirty="0"/>
+              <a:t>Bottom‑left: single‑path decomposition — diffusion only vs </a:t>
+            </a:r>
+            <a:r>
+              <a:rPr dirty="0" err="1"/>
+              <a:t>diffusion+jumps</a:t>
+            </a:r>
+            <a:r>
+              <a:rPr dirty="0"/>
+              <a:t>; arrows show discrete jumps.</a:t>
             </a:r>
           </a:p>
           <a:p>
@@ -11966,7 +12536,16 @@
               </a:defRPr>
             </a:pPr>
             <a:r>
-              <a:t>Bottom‑right: histogram of jump sizes J ~ N(μ_J, σ_J²); most jumps are small but frequent (λ≈23/year).</a:t>
+              <a:rPr dirty="0"/>
+              <a:t>Bottom‑right: histogram of jump sizes J ~ N(</a:t>
+            </a:r>
+            <a:r>
+              <a:rPr dirty="0" err="1"/>
+              <a:t>μ_J</a:t>
+            </a:r>
+            <a:r>
+              <a:rPr dirty="0"/>
+              <a:t>, σ_J²); most jumps are small but frequent (λ≈23/year).</a:t>
             </a:r>
           </a:p>
         </p:txBody>
